--- a/docs/Supplements/CPUZ_HW_Intel_Modernization_Overview.pptx
+++ b/docs/Supplements/CPUZ_HW_Intel_Modernization_Overview.pptx
@@ -14,10 +14,11 @@
     <p:sldId id="262" r:id="rId8"/>
     <p:sldId id="263" r:id="rId9"/>
     <p:sldId id="264" r:id="rId10"/>
-    <p:sldId id="265" r:id="rId11"/>
-    <p:sldId id="266" r:id="rId12"/>
-    <p:sldId id="267" r:id="rId13"/>
-    <p:sldId id="268" r:id="rId14"/>
+    <p:sldId id="269" r:id="rId11"/>
+    <p:sldId id="265" r:id="rId12"/>
+    <p:sldId id="266" r:id="rId13"/>
+    <p:sldId id="267" r:id="rId14"/>
+    <p:sldId id="268" r:id="rId15"/>
   </p:sldIdLst>
   <p:sldSz cx="12192000" cy="6858000"/>
   <p:notesSz cx="6858000" cy="9144000"/>
@@ -314,7 +315,7 @@
           <a:p>
             <a:fld id="{5BCAD085-E8A6-8845-BD4E-CB4CCA059FC4}" type="datetimeFigureOut">
               <a:rPr lang="en-US" smtClean="0"/>
-              <a:t>10/21/2026</a:t>
+              <a:t>10/22/2026</a:t>
             </a:fld>
             <a:endParaRPr lang="en-US"/>
           </a:p>
@@ -482,7 +483,7 @@
           <a:p>
             <a:fld id="{5BCAD085-E8A6-8845-BD4E-CB4CCA059FC4}" type="datetimeFigureOut">
               <a:rPr lang="en-US" smtClean="0"/>
-              <a:t>10/21/2026</a:t>
+              <a:t>10/22/2026</a:t>
             </a:fld>
             <a:endParaRPr lang="en-US"/>
           </a:p>
@@ -660,7 +661,7 @@
           <a:p>
             <a:fld id="{5BCAD085-E8A6-8845-BD4E-CB4CCA059FC4}" type="datetimeFigureOut">
               <a:rPr lang="en-US" smtClean="0"/>
-              <a:t>10/21/2026</a:t>
+              <a:t>10/22/2026</a:t>
             </a:fld>
             <a:endParaRPr lang="en-US"/>
           </a:p>
@@ -828,7 +829,7 @@
           <a:p>
             <a:fld id="{5BCAD085-E8A6-8845-BD4E-CB4CCA059FC4}" type="datetimeFigureOut">
               <a:rPr lang="en-US" smtClean="0"/>
-              <a:t>10/21/2026</a:t>
+              <a:t>10/22/2026</a:t>
             </a:fld>
             <a:endParaRPr lang="en-US"/>
           </a:p>
@@ -1073,7 +1074,7 @@
           <a:p>
             <a:fld id="{5BCAD085-E8A6-8845-BD4E-CB4CCA059FC4}" type="datetimeFigureOut">
               <a:rPr lang="en-US" smtClean="0"/>
-              <a:t>10/21/2026</a:t>
+              <a:t>10/22/2026</a:t>
             </a:fld>
             <a:endParaRPr lang="en-US"/>
           </a:p>
@@ -1358,7 +1359,7 @@
           <a:p>
             <a:fld id="{5BCAD085-E8A6-8845-BD4E-CB4CCA059FC4}" type="datetimeFigureOut">
               <a:rPr lang="en-US" smtClean="0"/>
-              <a:t>10/21/2026</a:t>
+              <a:t>10/22/2026</a:t>
             </a:fld>
             <a:endParaRPr lang="en-US"/>
           </a:p>
@@ -1777,7 +1778,7 @@
           <a:p>
             <a:fld id="{5BCAD085-E8A6-8845-BD4E-CB4CCA059FC4}" type="datetimeFigureOut">
               <a:rPr lang="en-US" smtClean="0"/>
-              <a:t>10/21/2026</a:t>
+              <a:t>10/22/2026</a:t>
             </a:fld>
             <a:endParaRPr lang="en-US"/>
           </a:p>
@@ -1894,7 +1895,7 @@
           <a:p>
             <a:fld id="{5BCAD085-E8A6-8845-BD4E-CB4CCA059FC4}" type="datetimeFigureOut">
               <a:rPr lang="en-US" smtClean="0"/>
-              <a:t>10/21/2026</a:t>
+              <a:t>10/22/2026</a:t>
             </a:fld>
             <a:endParaRPr lang="en-US"/>
           </a:p>
@@ -1989,7 +1990,7 @@
           <a:p>
             <a:fld id="{5BCAD085-E8A6-8845-BD4E-CB4CCA059FC4}" type="datetimeFigureOut">
               <a:rPr lang="en-US" smtClean="0"/>
-              <a:t>10/21/2026</a:t>
+              <a:t>10/22/2026</a:t>
             </a:fld>
             <a:endParaRPr lang="en-US"/>
           </a:p>
@@ -2264,7 +2265,7 @@
           <a:p>
             <a:fld id="{5BCAD085-E8A6-8845-BD4E-CB4CCA059FC4}" type="datetimeFigureOut">
               <a:rPr lang="en-US" smtClean="0"/>
-              <a:t>10/21/2026</a:t>
+              <a:t>10/22/2026</a:t>
             </a:fld>
             <a:endParaRPr lang="en-US"/>
           </a:p>
@@ -2516,7 +2517,7 @@
           <a:p>
             <a:fld id="{5BCAD085-E8A6-8845-BD4E-CB4CCA059FC4}" type="datetimeFigureOut">
               <a:rPr lang="en-US" smtClean="0"/>
-              <a:t>10/21/2026</a:t>
+              <a:t>10/22/2026</a:t>
             </a:fld>
             <a:endParaRPr lang="en-US"/>
           </a:p>
@@ -2727,7 +2728,7 @@
           <a:p>
             <a:fld id="{5BCAD085-E8A6-8845-BD4E-CB4CCA059FC4}" type="datetimeFigureOut">
               <a:rPr lang="en-US" smtClean="0"/>
-              <a:t>10/21/2026</a:t>
+              <a:t>10/22/2026</a:t>
             </a:fld>
             <a:endParaRPr lang="en-US"/>
           </a:p>
@@ -3527,7 +3528,13 @@
     </p:bg>
     <p:spTree>
       <p:nvGrpSpPr>
-        <p:cNvPr id="1" name=""/>
+        <p:cNvPr id="1" name="">
+          <a:extLst>
+            <a:ext uri="{FF2B5EF4-FFF2-40B4-BE49-F238E27FC236}">
+              <a16:creationId xmlns:a16="http://schemas.microsoft.com/office/drawing/2014/main" id="{8E576323-E678-5FC1-6733-C834831C4F8F}"/>
+            </a:ext>
+          </a:extLst>
+        </p:cNvPr>
         <p:cNvGrpSpPr/>
         <p:nvPr/>
       </p:nvGrpSpPr>
@@ -3541,7 +3548,13 @@
       </p:grpSpPr>
       <p:sp>
         <p:nvSpPr>
-          <p:cNvPr id="2" name="TextBox 1"/>
+          <p:cNvPr id="2" name="TextBox 1">
+            <a:extLst>
+              <a:ext uri="{FF2B5EF4-FFF2-40B4-BE49-F238E27FC236}">
+                <a16:creationId xmlns:a16="http://schemas.microsoft.com/office/drawing/2014/main" id="{4D5DC7D5-89D7-8711-209D-196A4366F6AA}"/>
+              </a:ext>
+            </a:extLst>
+          </p:cNvPr>
           <p:cNvSpPr txBox="1"/>
           <p:nvPr/>
         </p:nvSpPr>
@@ -3569,14 +3582,20 @@
                 </a:solidFill>
                 <a:latin typeface="Aptos"/>
               </a:rPr>
-              <a:t>09 / PRODUCT VISUALS</a:t>
-            </a:r>
-          </a:p>
-        </p:txBody>
-      </p:sp>
-      <p:sp>
-        <p:nvSpPr>
-          <p:cNvPr id="3" name="TextBox 2"/>
+              <a:t>08 / COMPARISON</a:t>
+            </a:r>
+          </a:p>
+        </p:txBody>
+      </p:sp>
+      <p:sp>
+        <p:nvSpPr>
+          <p:cNvPr id="3" name="TextBox 2">
+            <a:extLst>
+              <a:ext uri="{FF2B5EF4-FFF2-40B4-BE49-F238E27FC236}">
+                <a16:creationId xmlns:a16="http://schemas.microsoft.com/office/drawing/2014/main" id="{58EFA5D6-53C5-3926-4CE9-E9AEAD7E1710}"/>
+              </a:ext>
+            </a:extLst>
+          </p:cNvPr>
           <p:cNvSpPr txBox="1"/>
           <p:nvPr/>
         </p:nvSpPr>
@@ -3604,14 +3623,20 @@
                 </a:solidFill>
                 <a:latin typeface="Aptos"/>
               </a:rPr>
-              <a:t>HW Intel — dashboard concept</a:t>
-            </a:r>
-          </a:p>
-        </p:txBody>
-      </p:sp>
-      <p:sp>
-        <p:nvSpPr>
-          <p:cNvPr id="4" name="TextBox 3"/>
+              <a:t>Traditional CPU-Z vs. HW Intel</a:t>
+            </a:r>
+          </a:p>
+        </p:txBody>
+      </p:sp>
+      <p:sp>
+        <p:nvSpPr>
+          <p:cNvPr id="4" name="TextBox 3">
+            <a:extLst>
+              <a:ext uri="{FF2B5EF4-FFF2-40B4-BE49-F238E27FC236}">
+                <a16:creationId xmlns:a16="http://schemas.microsoft.com/office/drawing/2014/main" id="{35F038B0-351D-9F33-5552-C99C2EB2D0D8}"/>
+              </a:ext>
+            </a:extLst>
+          </p:cNvPr>
           <p:cNvSpPr txBox="1"/>
           <p:nvPr/>
         </p:nvSpPr>
@@ -3639,14 +3664,20 @@
                 </a:solidFill>
                 <a:latin typeface="Aptos"/>
               </a:rPr>
-              <a:t>Illustrative layout only. Replace these concept mockups with screenshots captured from the running application.</a:t>
-            </a:r>
-          </a:p>
-        </p:txBody>
-      </p:sp>
-      <p:sp>
-        <p:nvSpPr>
-          <p:cNvPr id="5" name="Rectangle 4"/>
+              <a:t>The aim is not only a visual reskin: it is a more discoverable, testable, and transparent experience.</a:t>
+            </a:r>
+          </a:p>
+        </p:txBody>
+      </p:sp>
+      <p:sp>
+        <p:nvSpPr>
+          <p:cNvPr id="5" name="Rectangle 4">
+            <a:extLst>
+              <a:ext uri="{FF2B5EF4-FFF2-40B4-BE49-F238E27FC236}">
+                <a16:creationId xmlns:a16="http://schemas.microsoft.com/office/drawing/2014/main" id="{D7773696-4894-DDB4-92F1-0EE07FBF32B5}"/>
+              </a:ext>
+            </a:extLst>
+          </p:cNvPr>
           <p:cNvSpPr/>
           <p:nvPr/>
         </p:nvSpPr>
@@ -3692,7 +3723,13 @@
       </p:sp>
       <p:sp>
         <p:nvSpPr>
-          <p:cNvPr id="6" name="TextBox 5"/>
+          <p:cNvPr id="6" name="TextBox 5">
+            <a:extLst>
+              <a:ext uri="{FF2B5EF4-FFF2-40B4-BE49-F238E27FC236}">
+                <a16:creationId xmlns:a16="http://schemas.microsoft.com/office/drawing/2014/main" id="{7FB14877-21AE-6ED9-4CF4-61AD6EBEBFD1}"/>
+              </a:ext>
+            </a:extLst>
+          </p:cNvPr>
           <p:cNvSpPr txBox="1"/>
           <p:nvPr/>
         </p:nvSpPr>
@@ -3720,14 +3757,20 @@
                 </a:solidFill>
                 <a:latin typeface="Aptos"/>
               </a:rPr>
-              <a:t>10</a:t>
-            </a:r>
-          </a:p>
-        </p:txBody>
-      </p:sp>
-      <p:sp>
-        <p:nvSpPr>
-          <p:cNvPr id="7" name="TextBox 6"/>
+              <a:t>09</a:t>
+            </a:r>
+          </a:p>
+        </p:txBody>
+      </p:sp>
+      <p:sp>
+        <p:nvSpPr>
+          <p:cNvPr id="7" name="TextBox 6">
+            <a:extLst>
+              <a:ext uri="{FF2B5EF4-FFF2-40B4-BE49-F238E27FC236}">
+                <a16:creationId xmlns:a16="http://schemas.microsoft.com/office/drawing/2014/main" id="{604543E9-FE6B-3124-2BCE-19EDE7F544F7}"/>
+              </a:ext>
+            </a:extLst>
+          </p:cNvPr>
           <p:cNvSpPr txBox="1"/>
           <p:nvPr/>
         </p:nvSpPr>
@@ -3762,14 +3805,20 @@
       </p:sp>
       <p:sp>
         <p:nvSpPr>
-          <p:cNvPr id="49" name="Rounded Rectangle 48"/>
+          <p:cNvPr id="8" name="Rounded Rectangle 7">
+            <a:extLst>
+              <a:ext uri="{FF2B5EF4-FFF2-40B4-BE49-F238E27FC236}">
+                <a16:creationId xmlns:a16="http://schemas.microsoft.com/office/drawing/2014/main" id="{77C162E7-8ED3-E135-41F0-319D8F762483}"/>
+              </a:ext>
+            </a:extLst>
+          </p:cNvPr>
           <p:cNvSpPr/>
           <p:nvPr/>
         </p:nvSpPr>
         <p:spPr>
           <a:xfrm>
-            <a:off x="7726679" y="2148840"/>
-            <a:ext cx="3566160" cy="960120"/>
+            <a:off x="731520" y="1993392"/>
+            <a:ext cx="5166360" cy="4114800"/>
           </a:xfrm>
           <a:prstGeom prst="roundRect">
             <a:avLst>
@@ -3777,7 +3826,7 @@
             </a:avLst>
           </a:prstGeom>
           <a:solidFill>
-            <a:srgbClr val="141C2F"/>
+            <a:srgbClr val="181E2C"/>
           </a:solidFill>
           <a:ln>
             <a:solidFill>
@@ -3810,130 +3859,20 @@
       </p:sp>
       <p:sp>
         <p:nvSpPr>
-          <p:cNvPr id="50" name="Rectangle 49"/>
+          <p:cNvPr id="9" name="Rounded Rectangle 8">
+            <a:extLst>
+              <a:ext uri="{FF2B5EF4-FFF2-40B4-BE49-F238E27FC236}">
+                <a16:creationId xmlns:a16="http://schemas.microsoft.com/office/drawing/2014/main" id="{30CE68AC-3644-7AD3-946E-C96C41E67A27}"/>
+              </a:ext>
+            </a:extLst>
+          </p:cNvPr>
           <p:cNvSpPr/>
           <p:nvPr/>
         </p:nvSpPr>
         <p:spPr>
           <a:xfrm>
-            <a:off x="7891271" y="2350008"/>
-            <a:ext cx="41148" cy="557784"/>
-          </a:xfrm>
-          <a:prstGeom prst="rect">
-            <a:avLst/>
-          </a:prstGeom>
-          <a:solidFill>
-            <a:srgbClr val="3FDAE8"/>
-          </a:solidFill>
-          <a:ln>
-            <a:solidFill>
-              <a:srgbClr val="3FDAE8"/>
-            </a:solidFill>
-          </a:ln>
-        </p:spPr>
-        <p:style>
-          <a:lnRef idx="1">
-            <a:schemeClr val="accent1"/>
-          </a:lnRef>
-          <a:fillRef idx="3">
-            <a:schemeClr val="accent1"/>
-          </a:fillRef>
-          <a:effectRef idx="2">
-            <a:schemeClr val="accent1"/>
-          </a:effectRef>
-          <a:fontRef idx="minor">
-            <a:schemeClr val="lt1"/>
-          </a:fontRef>
-        </p:style>
-        <p:txBody>
-          <a:bodyPr rtlCol="0" anchor="ctr"/>
-          <a:lstStyle/>
-          <a:p>
-            <a:pPr algn="ctr"/>
-            <a:endParaRPr/>
-          </a:p>
-        </p:txBody>
-      </p:sp>
-      <p:sp>
-        <p:nvSpPr>
-          <p:cNvPr id="51" name="TextBox 50"/>
-          <p:cNvSpPr txBox="1"/>
-          <p:nvPr/>
-        </p:nvSpPr>
-        <p:spPr>
-          <a:xfrm>
-            <a:off x="8074152" y="2350008"/>
-            <a:ext cx="3017520" cy="320040"/>
-          </a:xfrm>
-          <a:prstGeom prst="rect">
-            <a:avLst/>
-          </a:prstGeom>
-          <a:noFill/>
-        </p:spPr>
-        <p:txBody>
-          <a:bodyPr wrap="square" lIns="18288" tIns="18288" rIns="18288" bIns="18288" anchor="t">
-            <a:spAutoFit/>
-          </a:bodyPr>
-          <a:lstStyle/>
-          <a:p>
-            <a:pPr algn="l"/>
-            <a:r>
-              <a:rPr sz="1600" b="1" i="0">
-                <a:solidFill>
-                  <a:srgbClr val="F2F6FF"/>
-                </a:solidFill>
-                <a:latin typeface="Aptos"/>
-              </a:rPr>
-              <a:t>Overview</a:t>
-            </a:r>
-          </a:p>
-        </p:txBody>
-      </p:sp>
-      <p:sp>
-        <p:nvSpPr>
-          <p:cNvPr id="52" name="TextBox 51"/>
-          <p:cNvSpPr txBox="1"/>
-          <p:nvPr/>
-        </p:nvSpPr>
-        <p:spPr>
-          <a:xfrm>
-            <a:off x="8074152" y="2788920"/>
-            <a:ext cx="2999232" cy="182880"/>
-          </a:xfrm>
-          <a:prstGeom prst="rect">
-            <a:avLst/>
-          </a:prstGeom>
-          <a:noFill/>
-        </p:spPr>
-        <p:txBody>
-          <a:bodyPr wrap="square" lIns="18288" tIns="18288" rIns="18288" bIns="18288" anchor="t">
-            <a:spAutoFit/>
-          </a:bodyPr>
-          <a:lstStyle/>
-          <a:p>
-            <a:pPr algn="l"/>
-            <a:r>
-              <a:rPr sz="1100" b="0" i="0">
-                <a:solidFill>
-                  <a:srgbClr val="A0AEC6"/>
-                </a:solidFill>
-                <a:latin typeface="Aptos"/>
-              </a:rPr>
-              <a:t>At-a-glance hardware profile and key metrics.</a:t>
-            </a:r>
-          </a:p>
-        </p:txBody>
-      </p:sp>
-      <p:sp>
-        <p:nvSpPr>
-          <p:cNvPr id="53" name="Rounded Rectangle 52"/>
-          <p:cNvSpPr/>
-          <p:nvPr/>
-        </p:nvSpPr>
-        <p:spPr>
-          <a:xfrm>
-            <a:off x="7726679" y="3337560"/>
-            <a:ext cx="3566160" cy="960120"/>
+            <a:off x="6217920" y="1993392"/>
+            <a:ext cx="5212080" cy="4114800"/>
           </a:xfrm>
           <a:prstGeom prst="roundRect">
             <a:avLst>
@@ -3941,7 +3880,7 @@
             </a:avLst>
           </a:prstGeom>
           <a:solidFill>
-            <a:srgbClr val="141C2F"/>
+            <a:srgbClr val="101F30"/>
           </a:solidFill>
           <a:ln>
             <a:solidFill>
@@ -3974,345 +3913,789 @@
       </p:sp>
       <p:sp>
         <p:nvSpPr>
-          <p:cNvPr id="54" name="Rectangle 53"/>
-          <p:cNvSpPr/>
-          <p:nvPr/>
-        </p:nvSpPr>
-        <p:spPr>
-          <a:xfrm>
-            <a:off x="7891271" y="3538728"/>
-            <a:ext cx="41148" cy="557784"/>
-          </a:xfrm>
-          <a:prstGeom prst="rect">
-            <a:avLst/>
-          </a:prstGeom>
-          <a:solidFill>
-            <a:srgbClr val="5780FF"/>
-          </a:solidFill>
-          <a:ln>
-            <a:solidFill>
-              <a:srgbClr val="5780FF"/>
-            </a:solidFill>
-          </a:ln>
-        </p:spPr>
-        <p:style>
-          <a:lnRef idx="1">
-            <a:schemeClr val="accent1"/>
-          </a:lnRef>
-          <a:fillRef idx="3">
-            <a:schemeClr val="accent1"/>
-          </a:fillRef>
-          <a:effectRef idx="2">
-            <a:schemeClr val="accent1"/>
-          </a:effectRef>
-          <a:fontRef idx="minor">
-            <a:schemeClr val="lt1"/>
-          </a:fontRef>
-        </p:style>
-        <p:txBody>
-          <a:bodyPr rtlCol="0" anchor="ctr"/>
-          <a:lstStyle/>
-          <a:p>
-            <a:pPr algn="ctr"/>
-            <a:endParaRPr/>
-          </a:p>
-        </p:txBody>
-      </p:sp>
-      <p:sp>
-        <p:nvSpPr>
-          <p:cNvPr id="55" name="TextBox 54"/>
-          <p:cNvSpPr txBox="1"/>
-          <p:nvPr/>
-        </p:nvSpPr>
-        <p:spPr>
-          <a:xfrm>
-            <a:off x="8074152" y="3538728"/>
-            <a:ext cx="3017520" cy="320040"/>
-          </a:xfrm>
-          <a:prstGeom prst="rect">
-            <a:avLst/>
-          </a:prstGeom>
-          <a:noFill/>
-        </p:spPr>
-        <p:txBody>
-          <a:bodyPr wrap="square" lIns="18288" tIns="18288" rIns="18288" bIns="18288" anchor="t">
-            <a:spAutoFit/>
-          </a:bodyPr>
-          <a:lstStyle/>
-          <a:p>
-            <a:pPr algn="l"/>
-            <a:r>
-              <a:rPr sz="1600" b="1" i="0">
-                <a:solidFill>
-                  <a:srgbClr val="F2F6FF"/>
-                </a:solidFill>
-                <a:latin typeface="Aptos"/>
-              </a:rPr>
-              <a:t>Visual hierarchy</a:t>
-            </a:r>
-          </a:p>
-        </p:txBody>
-      </p:sp>
-      <p:sp>
-        <p:nvSpPr>
-          <p:cNvPr id="56" name="TextBox 55"/>
-          <p:cNvSpPr txBox="1"/>
-          <p:nvPr/>
-        </p:nvSpPr>
-        <p:spPr>
-          <a:xfrm>
-            <a:off x="8074152" y="3977639"/>
-            <a:ext cx="2999232" cy="182880"/>
-          </a:xfrm>
-          <a:prstGeom prst="rect">
-            <a:avLst/>
-          </a:prstGeom>
-          <a:noFill/>
-        </p:spPr>
-        <p:txBody>
-          <a:bodyPr wrap="square" lIns="18288" tIns="18288" rIns="18288" bIns="18288" anchor="t">
-            <a:spAutoFit/>
-          </a:bodyPr>
-          <a:lstStyle/>
-          <a:p>
-            <a:pPr algn="l"/>
-            <a:r>
-              <a:rPr sz="1100" b="0" i="0">
-                <a:solidFill>
-                  <a:srgbClr val="A0AEC6"/>
-                </a:solidFill>
-                <a:latin typeface="Aptos"/>
-              </a:rPr>
-              <a:t>Distinct sections, clear labels, and readable technical detail.</a:t>
-            </a:r>
-          </a:p>
-        </p:txBody>
-      </p:sp>
-      <p:sp>
-        <p:nvSpPr>
-          <p:cNvPr id="57" name="Rounded Rectangle 56"/>
-          <p:cNvSpPr/>
-          <p:nvPr/>
-        </p:nvSpPr>
-        <p:spPr>
-          <a:xfrm>
-            <a:off x="7726679" y="4526280"/>
-            <a:ext cx="3566160" cy="1097280"/>
-          </a:xfrm>
-          <a:prstGeom prst="roundRect">
-            <a:avLst>
-              <a:gd name="adj" fmla="val 12000"/>
-            </a:avLst>
-          </a:prstGeom>
-          <a:solidFill>
-            <a:srgbClr val="141C2F"/>
-          </a:solidFill>
-          <a:ln>
-            <a:solidFill>
-              <a:srgbClr val="313F59"/>
-            </a:solidFill>
-          </a:ln>
-        </p:spPr>
-        <p:style>
-          <a:lnRef idx="1">
-            <a:schemeClr val="accent1"/>
-          </a:lnRef>
-          <a:fillRef idx="3">
-            <a:schemeClr val="accent1"/>
-          </a:fillRef>
-          <a:effectRef idx="2">
-            <a:schemeClr val="accent1"/>
-          </a:effectRef>
-          <a:fontRef idx="minor">
-            <a:schemeClr val="lt1"/>
-          </a:fontRef>
-        </p:style>
-        <p:txBody>
-          <a:bodyPr rtlCol="0" anchor="ctr"/>
-          <a:lstStyle/>
-          <a:p>
-            <a:pPr algn="ctr"/>
-            <a:endParaRPr/>
-          </a:p>
-        </p:txBody>
-      </p:sp>
-      <p:sp>
-        <p:nvSpPr>
-          <p:cNvPr id="58" name="Rectangle 57"/>
-          <p:cNvSpPr/>
-          <p:nvPr/>
-        </p:nvSpPr>
-        <p:spPr>
-          <a:xfrm>
-            <a:off x="7891271" y="4727448"/>
-            <a:ext cx="41148" cy="557784"/>
-          </a:xfrm>
-          <a:prstGeom prst="rect">
-            <a:avLst/>
-          </a:prstGeom>
-          <a:solidFill>
-            <a:srgbClr val="FFBF5C"/>
-          </a:solidFill>
-          <a:ln>
-            <a:solidFill>
-              <a:srgbClr val="FFBF5C"/>
-            </a:solidFill>
-          </a:ln>
-        </p:spPr>
-        <p:style>
-          <a:lnRef idx="1">
-            <a:schemeClr val="accent1"/>
-          </a:lnRef>
-          <a:fillRef idx="3">
-            <a:schemeClr val="accent1"/>
-          </a:fillRef>
-          <a:effectRef idx="2">
-            <a:schemeClr val="accent1"/>
-          </a:effectRef>
-          <a:fontRef idx="minor">
-            <a:schemeClr val="lt1"/>
-          </a:fontRef>
-        </p:style>
-        <p:txBody>
-          <a:bodyPr rtlCol="0" anchor="ctr"/>
-          <a:lstStyle/>
-          <a:p>
-            <a:pPr algn="ctr"/>
-            <a:endParaRPr/>
-          </a:p>
-        </p:txBody>
-      </p:sp>
-      <p:sp>
-        <p:nvSpPr>
-          <p:cNvPr id="59" name="TextBox 58"/>
-          <p:cNvSpPr txBox="1"/>
-          <p:nvPr/>
-        </p:nvSpPr>
-        <p:spPr>
-          <a:xfrm>
-            <a:off x="8074152" y="4727448"/>
-            <a:ext cx="3017520" cy="320040"/>
-          </a:xfrm>
-          <a:prstGeom prst="rect">
-            <a:avLst/>
-          </a:prstGeom>
-          <a:noFill/>
-        </p:spPr>
-        <p:txBody>
-          <a:bodyPr wrap="square" lIns="18288" tIns="18288" rIns="18288" bIns="18288" anchor="t">
-            <a:spAutoFit/>
-          </a:bodyPr>
-          <a:lstStyle/>
-          <a:p>
-            <a:pPr algn="l"/>
-            <a:r>
-              <a:rPr sz="1600" b="1" i="0" dirty="0">
-                <a:solidFill>
-                  <a:srgbClr val="F2F6FF"/>
-                </a:solidFill>
-                <a:latin typeface="Aptos"/>
-              </a:rPr>
-              <a:t>Honest data</a:t>
-            </a:r>
-          </a:p>
-        </p:txBody>
-      </p:sp>
-      <p:sp>
-        <p:nvSpPr>
-          <p:cNvPr id="60" name="TextBox 59"/>
-          <p:cNvSpPr txBox="1"/>
-          <p:nvPr/>
-        </p:nvSpPr>
-        <p:spPr>
-          <a:xfrm>
-            <a:off x="8074152" y="5166360"/>
-            <a:ext cx="2999232" cy="182880"/>
-          </a:xfrm>
-          <a:prstGeom prst="rect">
-            <a:avLst/>
-          </a:prstGeom>
-          <a:noFill/>
-        </p:spPr>
-        <p:txBody>
-          <a:bodyPr wrap="square" lIns="18288" tIns="18288" rIns="18288" bIns="18288" anchor="t">
-            <a:spAutoFit/>
-          </a:bodyPr>
-          <a:lstStyle/>
-          <a:p>
-            <a:pPr algn="l"/>
-            <a:r>
-              <a:rPr sz="1100" b="0" i="0">
-                <a:solidFill>
-                  <a:srgbClr val="A0AEC6"/>
-                </a:solidFill>
-                <a:latin typeface="Aptos"/>
-              </a:rPr>
-              <a:t>Only verified values; unavailable fields are explicitly marked.</a:t>
-            </a:r>
-          </a:p>
-        </p:txBody>
-      </p:sp>
-      <p:pic>
-        <p:nvPicPr>
-          <p:cNvPr id="62" name="Picture 61">
+          <p:cNvPr id="10" name="TextBox 9">
             <a:extLst>
               <a:ext uri="{FF2B5EF4-FFF2-40B4-BE49-F238E27FC236}">
-                <a16:creationId xmlns:a16="http://schemas.microsoft.com/office/drawing/2014/main" id="{867959E3-1133-148A-DCF8-A18584F19E45}"/>
+                <a16:creationId xmlns:a16="http://schemas.microsoft.com/office/drawing/2014/main" id="{4C9A21ED-36D7-0F2E-F961-7CA9ABFF3D6C}"/>
               </a:ext>
             </a:extLst>
           </p:cNvPr>
-          <p:cNvPicPr>
-            <a:picLocks noChangeAspect="1"/>
-          </p:cNvPicPr>
-          <p:nvPr/>
-        </p:nvPicPr>
-        <p:blipFill>
-          <a:blip r:embed="rId2"/>
-          <a:stretch>
-            <a:fillRect/>
-          </a:stretch>
-        </p:blipFill>
-        <p:spPr>
-          <a:xfrm>
-            <a:off x="886762" y="1896608"/>
-            <a:ext cx="6080808" cy="4141407"/>
-          </a:xfrm>
-          <a:prstGeom prst="rect">
-            <a:avLst/>
-          </a:prstGeom>
-          <a:solidFill>
-            <a:srgbClr val="FFFFFF">
-              <a:shade val="85000"/>
-            </a:srgbClr>
-          </a:solidFill>
-          <a:ln w="88900" cap="sq">
-            <a:solidFill>
-              <a:srgbClr val="FFFFFF"/>
-            </a:solidFill>
-            <a:miter lim="800000"/>
-          </a:ln>
-          <a:effectLst>
-            <a:outerShdw blurRad="55000" dist="18000" dir="5400000" algn="tl" rotWithShape="0">
-              <a:srgbClr val="000000">
-                <a:alpha val="40000"/>
-              </a:srgbClr>
-            </a:outerShdw>
-          </a:effectLst>
-          <a:scene3d>
-            <a:camera prst="orthographicFront"/>
-            <a:lightRig rig="twoPt" dir="t">
-              <a:rot lat="0" lon="0" rev="7200000"/>
-            </a:lightRig>
-          </a:scene3d>
-          <a:sp3d>
-            <a:bevelT w="25400" h="19050"/>
-            <a:contourClr>
-              <a:srgbClr val="FFFFFF"/>
-            </a:contourClr>
-          </a:sp3d>
-        </p:spPr>
-      </p:pic>
+          <p:cNvSpPr txBox="1"/>
+          <p:nvPr/>
+        </p:nvSpPr>
+        <p:spPr>
+          <a:xfrm>
+            <a:off x="960120" y="2240280"/>
+            <a:ext cx="4389120" cy="274320"/>
+          </a:xfrm>
+          <a:prstGeom prst="rect">
+            <a:avLst/>
+          </a:prstGeom>
+          <a:noFill/>
+        </p:spPr>
+        <p:txBody>
+          <a:bodyPr wrap="square" lIns="18288" tIns="18288" rIns="18288" bIns="18288" anchor="t">
+            <a:spAutoFit/>
+          </a:bodyPr>
+          <a:lstStyle/>
+          <a:p>
+            <a:pPr algn="l"/>
+            <a:r>
+              <a:rPr sz="1600" b="1" i="0">
+                <a:solidFill>
+                  <a:srgbClr val="A0AEC6"/>
+                </a:solidFill>
+                <a:latin typeface="Aptos"/>
+              </a:rPr>
+              <a:t>TRADITIONAL CPU-Z</a:t>
+            </a:r>
+          </a:p>
+        </p:txBody>
+      </p:sp>
+      <p:sp>
+        <p:nvSpPr>
+          <p:cNvPr id="11" name="TextBox 10">
+            <a:extLst>
+              <a:ext uri="{FF2B5EF4-FFF2-40B4-BE49-F238E27FC236}">
+                <a16:creationId xmlns:a16="http://schemas.microsoft.com/office/drawing/2014/main" id="{1B0E0FFF-3A63-5C7C-24AF-CABCB1394B17}"/>
+              </a:ext>
+            </a:extLst>
+          </p:cNvPr>
+          <p:cNvSpPr txBox="1"/>
+          <p:nvPr/>
+        </p:nvSpPr>
+        <p:spPr>
+          <a:xfrm>
+            <a:off x="6446520" y="2240280"/>
+            <a:ext cx="4389120" cy="274320"/>
+          </a:xfrm>
+          <a:prstGeom prst="rect">
+            <a:avLst/>
+          </a:prstGeom>
+          <a:noFill/>
+        </p:spPr>
+        <p:txBody>
+          <a:bodyPr wrap="square" lIns="18288" tIns="18288" rIns="18288" bIns="18288" anchor="t">
+            <a:spAutoFit/>
+          </a:bodyPr>
+          <a:lstStyle/>
+          <a:p>
+            <a:pPr algn="l"/>
+            <a:r>
+              <a:rPr sz="1600" b="1" i="0">
+                <a:solidFill>
+                  <a:srgbClr val="3FDAE8"/>
+                </a:solidFill>
+                <a:latin typeface="Aptos"/>
+              </a:rPr>
+              <a:t>HW INTEL DASHBOARD</a:t>
+            </a:r>
+          </a:p>
+        </p:txBody>
+      </p:sp>
+      <p:sp>
+        <p:nvSpPr>
+          <p:cNvPr id="12" name="TextBox 11">
+            <a:extLst>
+              <a:ext uri="{FF2B5EF4-FFF2-40B4-BE49-F238E27FC236}">
+                <a16:creationId xmlns:a16="http://schemas.microsoft.com/office/drawing/2014/main" id="{C678E50B-812F-C097-50D9-86C5167B42F4}"/>
+              </a:ext>
+            </a:extLst>
+          </p:cNvPr>
+          <p:cNvSpPr txBox="1"/>
+          <p:nvPr/>
+        </p:nvSpPr>
+        <p:spPr>
+          <a:xfrm>
+            <a:off x="1005840" y="2724912"/>
+            <a:ext cx="4572000" cy="256032"/>
+          </a:xfrm>
+          <a:prstGeom prst="rect">
+            <a:avLst/>
+          </a:prstGeom>
+          <a:noFill/>
+        </p:spPr>
+        <p:txBody>
+          <a:bodyPr wrap="square" lIns="18288" tIns="18288" rIns="18288" bIns="18288" anchor="t">
+            <a:spAutoFit/>
+          </a:bodyPr>
+          <a:lstStyle/>
+          <a:p>
+            <a:pPr algn="l"/>
+            <a:r>
+              <a:rPr sz="1000" b="0" i="0">
+                <a:solidFill>
+                  <a:srgbClr val="F2F6FF"/>
+                </a:solidFill>
+                <a:latin typeface="Aptos"/>
+              </a:rPr>
+              <a:t>• Win32 tabbed dialog; fixed-size layout</a:t>
+            </a:r>
+          </a:p>
+        </p:txBody>
+      </p:sp>
+      <p:sp>
+        <p:nvSpPr>
+          <p:cNvPr id="13" name="TextBox 12">
+            <a:extLst>
+              <a:ext uri="{FF2B5EF4-FFF2-40B4-BE49-F238E27FC236}">
+                <a16:creationId xmlns:a16="http://schemas.microsoft.com/office/drawing/2014/main" id="{5A1A77B5-21CF-D140-394E-FC7C1A078145}"/>
+              </a:ext>
+            </a:extLst>
+          </p:cNvPr>
+          <p:cNvSpPr txBox="1"/>
+          <p:nvPr/>
+        </p:nvSpPr>
+        <p:spPr>
+          <a:xfrm>
+            <a:off x="1005840" y="3108960"/>
+            <a:ext cx="4572000" cy="256032"/>
+          </a:xfrm>
+          <a:prstGeom prst="rect">
+            <a:avLst/>
+          </a:prstGeom>
+          <a:noFill/>
+        </p:spPr>
+        <p:txBody>
+          <a:bodyPr wrap="square" lIns="18288" tIns="18288" rIns="18288" bIns="18288" anchor="t">
+            <a:spAutoFit/>
+          </a:bodyPr>
+          <a:lstStyle/>
+          <a:p>
+            <a:pPr algn="l"/>
+            <a:r>
+              <a:rPr sz="1000" b="0" i="0">
+                <a:solidFill>
+                  <a:srgbClr val="F2F6FF"/>
+                </a:solidFill>
+                <a:latin typeface="Aptos"/>
+              </a:rPr>
+              <a:t>• Plain labels and static fields</a:t>
+            </a:r>
+          </a:p>
+        </p:txBody>
+      </p:sp>
+      <p:sp>
+        <p:nvSpPr>
+          <p:cNvPr id="14" name="TextBox 13">
+            <a:extLst>
+              <a:ext uri="{FF2B5EF4-FFF2-40B4-BE49-F238E27FC236}">
+                <a16:creationId xmlns:a16="http://schemas.microsoft.com/office/drawing/2014/main" id="{68634887-BF3F-0D03-28E1-DC6A43171330}"/>
+              </a:ext>
+            </a:extLst>
+          </p:cNvPr>
+          <p:cNvSpPr txBox="1"/>
+          <p:nvPr/>
+        </p:nvSpPr>
+        <p:spPr>
+          <a:xfrm>
+            <a:off x="1005840" y="3493008"/>
+            <a:ext cx="4572000" cy="256032"/>
+          </a:xfrm>
+          <a:prstGeom prst="rect">
+            <a:avLst/>
+          </a:prstGeom>
+          <a:noFill/>
+        </p:spPr>
+        <p:txBody>
+          <a:bodyPr wrap="square" lIns="18288" tIns="18288" rIns="18288" bIns="18288" anchor="t">
+            <a:spAutoFit/>
+          </a:bodyPr>
+          <a:lstStyle/>
+          <a:p>
+            <a:pPr algn="l"/>
+            <a:r>
+              <a:rPr sz="1000" b="0" i="0">
+                <a:solidFill>
+                  <a:srgbClr val="F2F6FF"/>
+                </a:solidFill>
+                <a:latin typeface="Aptos"/>
+              </a:rPr>
+              <a:t>• Six fixed tabs; no global search</a:t>
+            </a:r>
+          </a:p>
+        </p:txBody>
+      </p:sp>
+      <p:sp>
+        <p:nvSpPr>
+          <p:cNvPr id="15" name="TextBox 14">
+            <a:extLst>
+              <a:ext uri="{FF2B5EF4-FFF2-40B4-BE49-F238E27FC236}">
+                <a16:creationId xmlns:a16="http://schemas.microsoft.com/office/drawing/2014/main" id="{36F773F6-BFCD-E5B8-458E-C2A94CF0EA55}"/>
+              </a:ext>
+            </a:extLst>
+          </p:cNvPr>
+          <p:cNvSpPr txBox="1"/>
+          <p:nvPr/>
+        </p:nvSpPr>
+        <p:spPr>
+          <a:xfrm>
+            <a:off x="1005840" y="3877056"/>
+            <a:ext cx="4572000" cy="256032"/>
+          </a:xfrm>
+          <a:prstGeom prst="rect">
+            <a:avLst/>
+          </a:prstGeom>
+          <a:noFill/>
+        </p:spPr>
+        <p:txBody>
+          <a:bodyPr wrap="square" lIns="18288" tIns="18288" rIns="18288" bIns="18288" anchor="t">
+            <a:spAutoFit/>
+          </a:bodyPr>
+          <a:lstStyle/>
+          <a:p>
+            <a:pPr algn="l"/>
+            <a:r>
+              <a:rPr sz="1000" b="0" i="0">
+                <a:solidFill>
+                  <a:srgbClr val="F2F6FF"/>
+                </a:solidFill>
+                <a:latin typeface="Aptos"/>
+              </a:rPr>
+              <a:t>• TXT / HTML report export</a:t>
+            </a:r>
+          </a:p>
+        </p:txBody>
+      </p:sp>
+      <p:sp>
+        <p:nvSpPr>
+          <p:cNvPr id="16" name="TextBox 15">
+            <a:extLst>
+              <a:ext uri="{FF2B5EF4-FFF2-40B4-BE49-F238E27FC236}">
+                <a16:creationId xmlns:a16="http://schemas.microsoft.com/office/drawing/2014/main" id="{FEAEDA1C-35AB-BCF7-DA09-29F27C2296E3}"/>
+              </a:ext>
+            </a:extLst>
+          </p:cNvPr>
+          <p:cNvSpPr txBox="1"/>
+          <p:nvPr/>
+        </p:nvSpPr>
+        <p:spPr>
+          <a:xfrm>
+            <a:off x="1005840" y="4261104"/>
+            <a:ext cx="4572000" cy="256032"/>
+          </a:xfrm>
+          <a:prstGeom prst="rect">
+            <a:avLst/>
+          </a:prstGeom>
+          <a:noFill/>
+        </p:spPr>
+        <p:txBody>
+          <a:bodyPr wrap="square" lIns="18288" tIns="18288" rIns="18288" bIns="18288" anchor="t">
+            <a:spAutoFit/>
+          </a:bodyPr>
+          <a:lstStyle/>
+          <a:p>
+            <a:pPr algn="l"/>
+            <a:r>
+              <a:rPr sz="1000" b="0" i="0">
+                <a:solidFill>
+                  <a:srgbClr val="F2F6FF"/>
+                </a:solidFill>
+                <a:latin typeface="Aptos"/>
+              </a:rPr>
+              <a:t>• Manual refresh (F5)</a:t>
+            </a:r>
+          </a:p>
+        </p:txBody>
+      </p:sp>
+      <p:sp>
+        <p:nvSpPr>
+          <p:cNvPr id="17" name="TextBox 16">
+            <a:extLst>
+              <a:ext uri="{FF2B5EF4-FFF2-40B4-BE49-F238E27FC236}">
+                <a16:creationId xmlns:a16="http://schemas.microsoft.com/office/drawing/2014/main" id="{03450B95-80BE-05E9-2CD5-4B19FDE64933}"/>
+              </a:ext>
+            </a:extLst>
+          </p:cNvPr>
+          <p:cNvSpPr txBox="1"/>
+          <p:nvPr/>
+        </p:nvSpPr>
+        <p:spPr>
+          <a:xfrm>
+            <a:off x="1005840" y="4645152"/>
+            <a:ext cx="4572000" cy="256032"/>
+          </a:xfrm>
+          <a:prstGeom prst="rect">
+            <a:avLst/>
+          </a:prstGeom>
+          <a:noFill/>
+        </p:spPr>
+        <p:txBody>
+          <a:bodyPr wrap="square" lIns="18288" tIns="18288" rIns="18288" bIns="18288" anchor="t">
+            <a:spAutoFit/>
+          </a:bodyPr>
+          <a:lstStyle/>
+          <a:p>
+            <a:pPr algn="l"/>
+            <a:r>
+              <a:rPr sz="1000" b="0" i="0">
+                <a:solidFill>
+                  <a:srgbClr val="F2F6FF"/>
+                </a:solidFill>
+                <a:latin typeface="Aptos"/>
+              </a:rPr>
+              <a:t>• Limited documented programmatic access</a:t>
+            </a:r>
+          </a:p>
+        </p:txBody>
+      </p:sp>
+      <p:sp>
+        <p:nvSpPr>
+          <p:cNvPr id="18" name="TextBox 17">
+            <a:extLst>
+              <a:ext uri="{FF2B5EF4-FFF2-40B4-BE49-F238E27FC236}">
+                <a16:creationId xmlns:a16="http://schemas.microsoft.com/office/drawing/2014/main" id="{F4BEA395-CBCF-ABB3-1B56-E5BC6ACC68A4}"/>
+              </a:ext>
+            </a:extLst>
+          </p:cNvPr>
+          <p:cNvSpPr txBox="1"/>
+          <p:nvPr/>
+        </p:nvSpPr>
+        <p:spPr>
+          <a:xfrm>
+            <a:off x="1005840" y="5029200"/>
+            <a:ext cx="4572000" cy="256032"/>
+          </a:xfrm>
+          <a:prstGeom prst="rect">
+            <a:avLst/>
+          </a:prstGeom>
+          <a:noFill/>
+        </p:spPr>
+        <p:txBody>
+          <a:bodyPr wrap="square" lIns="18288" tIns="18288" rIns="18288" bIns="18288" anchor="t">
+            <a:spAutoFit/>
+          </a:bodyPr>
+          <a:lstStyle/>
+          <a:p>
+            <a:pPr algn="l"/>
+            <a:r>
+              <a:rPr sz="1000" b="0" i="0">
+                <a:solidFill>
+                  <a:srgbClr val="F2F6FF"/>
+                </a:solidFill>
+                <a:latin typeface="Aptos"/>
+              </a:rPr>
+              <a:t>• Field sources and limitations less visible</a:t>
+            </a:r>
+          </a:p>
+        </p:txBody>
+      </p:sp>
+      <p:sp>
+        <p:nvSpPr>
+          <p:cNvPr id="19" name="TextBox 18">
+            <a:extLst>
+              <a:ext uri="{FF2B5EF4-FFF2-40B4-BE49-F238E27FC236}">
+                <a16:creationId xmlns:a16="http://schemas.microsoft.com/office/drawing/2014/main" id="{634AB1F7-034B-DAFB-73D9-D1B4C552A2BF}"/>
+              </a:ext>
+            </a:extLst>
+          </p:cNvPr>
+          <p:cNvSpPr txBox="1"/>
+          <p:nvPr/>
+        </p:nvSpPr>
+        <p:spPr>
+          <a:xfrm>
+            <a:off x="1005840" y="5413248"/>
+            <a:ext cx="4572000" cy="256032"/>
+          </a:xfrm>
+          <a:prstGeom prst="rect">
+            <a:avLst/>
+          </a:prstGeom>
+          <a:noFill/>
+        </p:spPr>
+        <p:txBody>
+          <a:bodyPr wrap="square" lIns="18288" tIns="18288" rIns="18288" bIns="18288" anchor="t">
+            <a:spAutoFit/>
+          </a:bodyPr>
+          <a:lstStyle/>
+          <a:p>
+            <a:pPr algn="l"/>
+            <a:r>
+              <a:rPr sz="1000" b="0" i="0">
+                <a:solidFill>
+                  <a:srgbClr val="F2F6FF"/>
+                </a:solidFill>
+                <a:latin typeface="Aptos"/>
+              </a:rPr>
+              <a:t>• Manual validation workflow</a:t>
+            </a:r>
+          </a:p>
+        </p:txBody>
+      </p:sp>
+      <p:sp>
+        <p:nvSpPr>
+          <p:cNvPr id="20" name="TextBox 19">
+            <a:extLst>
+              <a:ext uri="{FF2B5EF4-FFF2-40B4-BE49-F238E27FC236}">
+                <a16:creationId xmlns:a16="http://schemas.microsoft.com/office/drawing/2014/main" id="{CEB5604E-000E-4846-4DC0-4BEFE69979D4}"/>
+              </a:ext>
+            </a:extLst>
+          </p:cNvPr>
+          <p:cNvSpPr txBox="1"/>
+          <p:nvPr/>
+        </p:nvSpPr>
+        <p:spPr>
+          <a:xfrm>
+            <a:off x="6492240" y="2724912"/>
+            <a:ext cx="4617720" cy="256032"/>
+          </a:xfrm>
+          <a:prstGeom prst="rect">
+            <a:avLst/>
+          </a:prstGeom>
+          <a:noFill/>
+        </p:spPr>
+        <p:txBody>
+          <a:bodyPr wrap="square" lIns="18288" tIns="18288" rIns="18288" bIns="18288" anchor="t">
+            <a:spAutoFit/>
+          </a:bodyPr>
+          <a:lstStyle/>
+          <a:p>
+            <a:pPr algn="l"/>
+            <a:r>
+              <a:rPr sz="1000" b="0" i="0">
+                <a:solidFill>
+                  <a:srgbClr val="F2F6FF"/>
+                </a:solidFill>
+                <a:latin typeface="Aptos"/>
+              </a:rPr>
+              <a:t>• Dark-first responsive web interface</a:t>
+            </a:r>
+          </a:p>
+        </p:txBody>
+      </p:sp>
+      <p:sp>
+        <p:nvSpPr>
+          <p:cNvPr id="21" name="TextBox 20">
+            <a:extLst>
+              <a:ext uri="{FF2B5EF4-FFF2-40B4-BE49-F238E27FC236}">
+                <a16:creationId xmlns:a16="http://schemas.microsoft.com/office/drawing/2014/main" id="{83F5ABFF-16E1-F286-E69A-73E59EC063F6}"/>
+              </a:ext>
+            </a:extLst>
+          </p:cNvPr>
+          <p:cNvSpPr txBox="1"/>
+          <p:nvPr/>
+        </p:nvSpPr>
+        <p:spPr>
+          <a:xfrm>
+            <a:off x="6492240" y="3108960"/>
+            <a:ext cx="4617720" cy="256032"/>
+          </a:xfrm>
+          <a:prstGeom prst="rect">
+            <a:avLst/>
+          </a:prstGeom>
+          <a:noFill/>
+        </p:spPr>
+        <p:txBody>
+          <a:bodyPr wrap="square" lIns="18288" tIns="18288" rIns="18288" bIns="18288" anchor="t">
+            <a:spAutoFit/>
+          </a:bodyPr>
+          <a:lstStyle/>
+          <a:p>
+            <a:pPr algn="l"/>
+            <a:r>
+              <a:rPr sz="1000" b="0" i="0">
+                <a:solidFill>
+                  <a:srgbClr val="F2F6FF"/>
+                </a:solidFill>
+                <a:latin typeface="Aptos"/>
+              </a:rPr>
+              <a:t>• Metric cards, SVG gauges, topology &amp; cache visuals</a:t>
+            </a:r>
+          </a:p>
+        </p:txBody>
+      </p:sp>
+      <p:sp>
+        <p:nvSpPr>
+          <p:cNvPr id="22" name="TextBox 21">
+            <a:extLst>
+              <a:ext uri="{FF2B5EF4-FFF2-40B4-BE49-F238E27FC236}">
+                <a16:creationId xmlns:a16="http://schemas.microsoft.com/office/drawing/2014/main" id="{1237242E-C467-B7F7-EF79-9EAD4AE7FDE0}"/>
+              </a:ext>
+            </a:extLst>
+          </p:cNvPr>
+          <p:cNvSpPr txBox="1"/>
+          <p:nvPr/>
+        </p:nvSpPr>
+        <p:spPr>
+          <a:xfrm>
+            <a:off x="6492240" y="3493008"/>
+            <a:ext cx="4617720" cy="256032"/>
+          </a:xfrm>
+          <a:prstGeom prst="rect">
+            <a:avLst/>
+          </a:prstGeom>
+          <a:noFill/>
+        </p:spPr>
+        <p:txBody>
+          <a:bodyPr wrap="square" lIns="18288" tIns="18288" rIns="18288" bIns="18288" anchor="t">
+            <a:spAutoFit/>
+          </a:bodyPr>
+          <a:lstStyle/>
+          <a:p>
+            <a:pPr algn="l"/>
+            <a:r>
+              <a:rPr sz="1000" b="0" i="0">
+                <a:solidFill>
+                  <a:srgbClr val="F2F6FF"/>
+                </a:solidFill>
+                <a:latin typeface="Aptos"/>
+              </a:rPr>
+              <a:t>• Sidebar navigation and global field search</a:t>
+            </a:r>
+          </a:p>
+        </p:txBody>
+      </p:sp>
+      <p:sp>
+        <p:nvSpPr>
+          <p:cNvPr id="23" name="TextBox 22">
+            <a:extLst>
+              <a:ext uri="{FF2B5EF4-FFF2-40B4-BE49-F238E27FC236}">
+                <a16:creationId xmlns:a16="http://schemas.microsoft.com/office/drawing/2014/main" id="{3F2B9744-5BE9-C733-BB1F-02BAD8BF574B}"/>
+              </a:ext>
+            </a:extLst>
+          </p:cNvPr>
+          <p:cNvSpPr txBox="1"/>
+          <p:nvPr/>
+        </p:nvSpPr>
+        <p:spPr>
+          <a:xfrm>
+            <a:off x="6492240" y="3877056"/>
+            <a:ext cx="4617720" cy="256032"/>
+          </a:xfrm>
+          <a:prstGeom prst="rect">
+            <a:avLst/>
+          </a:prstGeom>
+          <a:noFill/>
+        </p:spPr>
+        <p:txBody>
+          <a:bodyPr wrap="square" lIns="18288" tIns="18288" rIns="18288" bIns="18288" anchor="t">
+            <a:spAutoFit/>
+          </a:bodyPr>
+          <a:lstStyle/>
+          <a:p>
+            <a:pPr algn="l"/>
+            <a:r>
+              <a:rPr sz="1000" b="0" i="0">
+                <a:solidFill>
+                  <a:srgbClr val="F2F6FF"/>
+                </a:solidFill>
+                <a:latin typeface="Aptos"/>
+              </a:rPr>
+              <a:t>• One-click JSON and CSV export</a:t>
+            </a:r>
+          </a:p>
+        </p:txBody>
+      </p:sp>
+      <p:sp>
+        <p:nvSpPr>
+          <p:cNvPr id="24" name="TextBox 23">
+            <a:extLst>
+              <a:ext uri="{FF2B5EF4-FFF2-40B4-BE49-F238E27FC236}">
+                <a16:creationId xmlns:a16="http://schemas.microsoft.com/office/drawing/2014/main" id="{CE26747C-3125-DAE6-F069-783A0CDADD3F}"/>
+              </a:ext>
+            </a:extLst>
+          </p:cNvPr>
+          <p:cNvSpPr txBox="1"/>
+          <p:nvPr/>
+        </p:nvSpPr>
+        <p:spPr>
+          <a:xfrm>
+            <a:off x="6492240" y="4261104"/>
+            <a:ext cx="4617720" cy="256032"/>
+          </a:xfrm>
+          <a:prstGeom prst="rect">
+            <a:avLst/>
+          </a:prstGeom>
+          <a:noFill/>
+        </p:spPr>
+        <p:txBody>
+          <a:bodyPr wrap="square" lIns="18288" tIns="18288" rIns="18288" bIns="18288" anchor="t">
+            <a:spAutoFit/>
+          </a:bodyPr>
+          <a:lstStyle/>
+          <a:p>
+            <a:pPr algn="l"/>
+            <a:r>
+              <a:rPr sz="1000" b="0" i="0">
+                <a:solidFill>
+                  <a:srgbClr val="F2F6FF"/>
+                </a:solidFill>
+                <a:latin typeface="Aptos"/>
+              </a:rPr>
+              <a:t>• Background polling for supported live metrics</a:t>
+            </a:r>
+          </a:p>
+        </p:txBody>
+      </p:sp>
+      <p:sp>
+        <p:nvSpPr>
+          <p:cNvPr id="25" name="TextBox 24">
+            <a:extLst>
+              <a:ext uri="{FF2B5EF4-FFF2-40B4-BE49-F238E27FC236}">
+                <a16:creationId xmlns:a16="http://schemas.microsoft.com/office/drawing/2014/main" id="{C8D0EFE1-19EA-A881-E39B-5115404E1FE5}"/>
+              </a:ext>
+            </a:extLst>
+          </p:cNvPr>
+          <p:cNvSpPr txBox="1"/>
+          <p:nvPr/>
+        </p:nvSpPr>
+        <p:spPr>
+          <a:xfrm>
+            <a:off x="6492240" y="4645152"/>
+            <a:ext cx="4617720" cy="256032"/>
+          </a:xfrm>
+          <a:prstGeom prst="rect">
+            <a:avLst/>
+          </a:prstGeom>
+          <a:noFill/>
+        </p:spPr>
+        <p:txBody>
+          <a:bodyPr wrap="square" lIns="18288" tIns="18288" rIns="18288" bIns="18288" anchor="t">
+            <a:spAutoFit/>
+          </a:bodyPr>
+          <a:lstStyle/>
+          <a:p>
+            <a:pPr algn="l"/>
+            <a:r>
+              <a:rPr sz="1000" b="0" i="0">
+                <a:solidFill>
+                  <a:srgbClr val="F2F6FF"/>
+                </a:solidFill>
+                <a:latin typeface="Aptos"/>
+              </a:rPr>
+              <a:t>• Documented REST API and OpenAPI docs</a:t>
+            </a:r>
+          </a:p>
+        </p:txBody>
+      </p:sp>
+      <p:sp>
+        <p:nvSpPr>
+          <p:cNvPr id="26" name="TextBox 25">
+            <a:extLst>
+              <a:ext uri="{FF2B5EF4-FFF2-40B4-BE49-F238E27FC236}">
+                <a16:creationId xmlns:a16="http://schemas.microsoft.com/office/drawing/2014/main" id="{C3121834-CAA1-757E-04CB-33407EB15491}"/>
+              </a:ext>
+            </a:extLst>
+          </p:cNvPr>
+          <p:cNvSpPr txBox="1"/>
+          <p:nvPr/>
+        </p:nvSpPr>
+        <p:spPr>
+          <a:xfrm>
+            <a:off x="6492240" y="5029200"/>
+            <a:ext cx="4617720" cy="256032"/>
+          </a:xfrm>
+          <a:prstGeom prst="rect">
+            <a:avLst/>
+          </a:prstGeom>
+          <a:noFill/>
+        </p:spPr>
+        <p:txBody>
+          <a:bodyPr wrap="square" lIns="18288" tIns="18288" rIns="18288" bIns="18288" anchor="t">
+            <a:spAutoFit/>
+          </a:bodyPr>
+          <a:lstStyle/>
+          <a:p>
+            <a:pPr algn="l"/>
+            <a:r>
+              <a:rPr sz="1000" b="0" i="0">
+                <a:solidFill>
+                  <a:srgbClr val="F2F6FF"/>
+                </a:solidFill>
+                <a:latin typeface="Aptos"/>
+              </a:rPr>
+              <a:t>• Source, units, availability and limitations shown</a:t>
+            </a:r>
+          </a:p>
+        </p:txBody>
+      </p:sp>
+      <p:sp>
+        <p:nvSpPr>
+          <p:cNvPr id="27" name="TextBox 26">
+            <a:extLst>
+              <a:ext uri="{FF2B5EF4-FFF2-40B4-BE49-F238E27FC236}">
+                <a16:creationId xmlns:a16="http://schemas.microsoft.com/office/drawing/2014/main" id="{97B56307-0D90-93A4-2979-00B8FF17302D}"/>
+              </a:ext>
+            </a:extLst>
+          </p:cNvPr>
+          <p:cNvSpPr txBox="1"/>
+          <p:nvPr/>
+        </p:nvSpPr>
+        <p:spPr>
+          <a:xfrm>
+            <a:off x="6492240" y="5413248"/>
+            <a:ext cx="4617720" cy="256032"/>
+          </a:xfrm>
+          <a:prstGeom prst="rect">
+            <a:avLst/>
+          </a:prstGeom>
+          <a:noFill/>
+        </p:spPr>
+        <p:txBody>
+          <a:bodyPr wrap="square" lIns="18288" tIns="18288" rIns="18288" bIns="18288" anchor="t">
+            <a:spAutoFit/>
+          </a:bodyPr>
+          <a:lstStyle/>
+          <a:p>
+            <a:pPr algn="l"/>
+            <a:r>
+              <a:rPr sz="1000" b="0" i="0">
+                <a:solidFill>
+                  <a:srgbClr val="F2F6FF"/>
+                </a:solidFill>
+                <a:latin typeface="Aptos"/>
+              </a:rPr>
+              <a:t>• Automated tests and repeatable validation</a:t>
+            </a:r>
+          </a:p>
+        </p:txBody>
+      </p:sp>
+      <p:sp>
+        <p:nvSpPr>
+          <p:cNvPr id="28" name="TextBox 27">
+            <a:extLst>
+              <a:ext uri="{FF2B5EF4-FFF2-40B4-BE49-F238E27FC236}">
+                <a16:creationId xmlns:a16="http://schemas.microsoft.com/office/drawing/2014/main" id="{357A20F1-C8FA-E590-8D4C-63998B60B75C}"/>
+              </a:ext>
+            </a:extLst>
+          </p:cNvPr>
+          <p:cNvSpPr txBox="1"/>
+          <p:nvPr/>
+        </p:nvSpPr>
+        <p:spPr>
+          <a:xfrm>
+            <a:off x="777240" y="6199632"/>
+            <a:ext cx="10698480" cy="256032"/>
+          </a:xfrm>
+          <a:prstGeom prst="rect">
+            <a:avLst/>
+          </a:prstGeom>
+          <a:noFill/>
+        </p:spPr>
+        <p:txBody>
+          <a:bodyPr wrap="square" lIns="18288" tIns="18288" rIns="18288" bIns="18288" anchor="t">
+            <a:spAutoFit/>
+          </a:bodyPr>
+          <a:lstStyle/>
+          <a:p>
+            <a:pPr algn="l"/>
+            <a:r>
+              <a:rPr sz="1400" b="1" i="0">
+                <a:solidFill>
+                  <a:srgbClr val="F2F6FF"/>
+                </a:solidFill>
+                <a:latin typeface="Aptos"/>
+              </a:rPr>
+              <a:t>CPU-Z identifies your hardware. HW Intel explains, visualizes, and exposes it—with an API.</a:t>
+            </a:r>
+          </a:p>
+        </p:txBody>
+      </p:sp>
     </p:spTree>
+    <p:extLst>
+      <p:ext uri="{BB962C8B-B14F-4D97-AF65-F5344CB8AC3E}">
+        <p14:creationId xmlns:p14="http://schemas.microsoft.com/office/powerpoint/2010/main" val="3002621581"/>
+      </p:ext>
+    </p:extLst>
   </p:cSld>
   <p:clrMapOvr>
     <a:masterClrMapping/>
@@ -4410,7 +4793,42 @@
                 </a:solidFill>
                 <a:latin typeface="Aptos"/>
               </a:rPr>
-              <a:t>Explore the details</a:t>
+              <a:t>HW Intel — dashboard concept</a:t>
+            </a:r>
+          </a:p>
+        </p:txBody>
+      </p:sp>
+      <p:sp>
+        <p:nvSpPr>
+          <p:cNvPr id="4" name="TextBox 3"/>
+          <p:cNvSpPr txBox="1"/>
+          <p:nvPr/>
+        </p:nvSpPr>
+        <p:spPr>
+          <a:xfrm>
+            <a:off x="621792" y="1234440"/>
+            <a:ext cx="10881360" cy="411480"/>
+          </a:xfrm>
+          <a:prstGeom prst="rect">
+            <a:avLst/>
+          </a:prstGeom>
+          <a:noFill/>
+        </p:spPr>
+        <p:txBody>
+          <a:bodyPr wrap="square" lIns="18288" tIns="18288" rIns="18288" bIns="18288" anchor="t">
+            <a:spAutoFit/>
+          </a:bodyPr>
+          <a:lstStyle/>
+          <a:p>
+            <a:pPr algn="l"/>
+            <a:r>
+              <a:rPr sz="1200" b="0" i="0">
+                <a:solidFill>
+                  <a:srgbClr val="A0AEC6"/>
+                </a:solidFill>
+                <a:latin typeface="Aptos"/>
+              </a:rPr>
+              <a:t>Illustrative layout only. Replace these concept mockups with screenshots captured from the running application.</a:t>
             </a:r>
           </a:p>
         </p:txBody>
@@ -4423,7 +4841,7 @@
         </p:nvSpPr>
         <p:spPr>
           <a:xfrm>
-            <a:off x="603238" y="1115393"/>
+            <a:off x="594360" y="1719072"/>
             <a:ext cx="10972800" cy="13716"/>
           </a:xfrm>
           <a:prstGeom prst="rect">
@@ -4491,7 +4909,7 @@
                 </a:solidFill>
                 <a:latin typeface="Aptos"/>
               </a:rPr>
-              <a:t>11</a:t>
+              <a:t>10</a:t>
             </a:r>
           </a:p>
         </p:txBody>
@@ -4533,80 +4951,502 @@
       </p:sp>
       <p:sp>
         <p:nvSpPr>
-          <p:cNvPr id="92" name="TextBox 91"/>
-          <p:cNvSpPr txBox="1"/>
-          <p:nvPr/>
-        </p:nvSpPr>
-        <p:spPr>
-          <a:xfrm>
-            <a:off x="2586956" y="6123373"/>
-            <a:ext cx="2286000" cy="236988"/>
-          </a:xfrm>
-          <a:prstGeom prst="rect">
-            <a:avLst/>
-          </a:prstGeom>
-          <a:noFill/>
-        </p:spPr>
-        <p:txBody>
-          <a:bodyPr wrap="square" lIns="18288" tIns="18288" rIns="18288" bIns="18288" anchor="t">
-            <a:spAutoFit/>
-          </a:bodyPr>
-          <a:lstStyle/>
-          <a:p>
-            <a:pPr algn="l"/>
-            <a:r>
-              <a:rPr sz="1300" b="1" i="0" dirty="0">
-                <a:solidFill>
-                  <a:srgbClr val="3FDAE8"/>
-                </a:solidFill>
-                <a:latin typeface="Aptos"/>
-              </a:rPr>
-              <a:t>CPU</a:t>
-            </a:r>
-          </a:p>
-        </p:txBody>
-      </p:sp>
-      <p:sp>
-        <p:nvSpPr>
-          <p:cNvPr id="93" name="TextBox 92"/>
-          <p:cNvSpPr txBox="1"/>
-          <p:nvPr/>
-        </p:nvSpPr>
-        <p:spPr>
-          <a:xfrm>
-            <a:off x="8522564" y="6132256"/>
-            <a:ext cx="2286000" cy="236988"/>
-          </a:xfrm>
-          <a:prstGeom prst="rect">
-            <a:avLst/>
-          </a:prstGeom>
-          <a:noFill/>
-        </p:spPr>
-        <p:txBody>
-          <a:bodyPr wrap="square" lIns="18288" tIns="18288" rIns="18288" bIns="18288" anchor="t">
-            <a:spAutoFit/>
-          </a:bodyPr>
-          <a:lstStyle/>
-          <a:p>
-            <a:pPr algn="l"/>
-            <a:r>
-              <a:rPr sz="1300" b="1" i="0" dirty="0">
-                <a:solidFill>
-                  <a:srgbClr val="9E71FF"/>
-                </a:solidFill>
-                <a:latin typeface="Aptos"/>
-              </a:rPr>
-              <a:t>Memory</a:t>
+          <p:cNvPr id="49" name="Rounded Rectangle 48"/>
+          <p:cNvSpPr/>
+          <p:nvPr/>
+        </p:nvSpPr>
+        <p:spPr>
+          <a:xfrm>
+            <a:off x="7726679" y="2148840"/>
+            <a:ext cx="3566160" cy="960120"/>
+          </a:xfrm>
+          <a:prstGeom prst="roundRect">
+            <a:avLst>
+              <a:gd name="adj" fmla="val 12000"/>
+            </a:avLst>
+          </a:prstGeom>
+          <a:solidFill>
+            <a:srgbClr val="141C2F"/>
+          </a:solidFill>
+          <a:ln>
+            <a:solidFill>
+              <a:srgbClr val="313F59"/>
+            </a:solidFill>
+          </a:ln>
+        </p:spPr>
+        <p:style>
+          <a:lnRef idx="1">
+            <a:schemeClr val="accent1"/>
+          </a:lnRef>
+          <a:fillRef idx="3">
+            <a:schemeClr val="accent1"/>
+          </a:fillRef>
+          <a:effectRef idx="2">
+            <a:schemeClr val="accent1"/>
+          </a:effectRef>
+          <a:fontRef idx="minor">
+            <a:schemeClr val="lt1"/>
+          </a:fontRef>
+        </p:style>
+        <p:txBody>
+          <a:bodyPr rtlCol="0" anchor="ctr"/>
+          <a:lstStyle/>
+          <a:p>
+            <a:pPr algn="ctr"/>
+            <a:endParaRPr/>
+          </a:p>
+        </p:txBody>
+      </p:sp>
+      <p:sp>
+        <p:nvSpPr>
+          <p:cNvPr id="50" name="Rectangle 49"/>
+          <p:cNvSpPr/>
+          <p:nvPr/>
+        </p:nvSpPr>
+        <p:spPr>
+          <a:xfrm>
+            <a:off x="7891271" y="2350008"/>
+            <a:ext cx="41148" cy="557784"/>
+          </a:xfrm>
+          <a:prstGeom prst="rect">
+            <a:avLst/>
+          </a:prstGeom>
+          <a:solidFill>
+            <a:srgbClr val="3FDAE8"/>
+          </a:solidFill>
+          <a:ln>
+            <a:solidFill>
+              <a:srgbClr val="3FDAE8"/>
+            </a:solidFill>
+          </a:ln>
+        </p:spPr>
+        <p:style>
+          <a:lnRef idx="1">
+            <a:schemeClr val="accent1"/>
+          </a:lnRef>
+          <a:fillRef idx="3">
+            <a:schemeClr val="accent1"/>
+          </a:fillRef>
+          <a:effectRef idx="2">
+            <a:schemeClr val="accent1"/>
+          </a:effectRef>
+          <a:fontRef idx="minor">
+            <a:schemeClr val="lt1"/>
+          </a:fontRef>
+        </p:style>
+        <p:txBody>
+          <a:bodyPr rtlCol="0" anchor="ctr"/>
+          <a:lstStyle/>
+          <a:p>
+            <a:pPr algn="ctr"/>
+            <a:endParaRPr/>
+          </a:p>
+        </p:txBody>
+      </p:sp>
+      <p:sp>
+        <p:nvSpPr>
+          <p:cNvPr id="51" name="TextBox 50"/>
+          <p:cNvSpPr txBox="1"/>
+          <p:nvPr/>
+        </p:nvSpPr>
+        <p:spPr>
+          <a:xfrm>
+            <a:off x="8074152" y="2350008"/>
+            <a:ext cx="3017520" cy="320040"/>
+          </a:xfrm>
+          <a:prstGeom prst="rect">
+            <a:avLst/>
+          </a:prstGeom>
+          <a:noFill/>
+        </p:spPr>
+        <p:txBody>
+          <a:bodyPr wrap="square" lIns="18288" tIns="18288" rIns="18288" bIns="18288" anchor="t">
+            <a:spAutoFit/>
+          </a:bodyPr>
+          <a:lstStyle/>
+          <a:p>
+            <a:pPr algn="l"/>
+            <a:r>
+              <a:rPr sz="1600" b="1" i="0">
+                <a:solidFill>
+                  <a:srgbClr val="F2F6FF"/>
+                </a:solidFill>
+                <a:latin typeface="Aptos"/>
+              </a:rPr>
+              <a:t>Overview</a:t>
+            </a:r>
+          </a:p>
+        </p:txBody>
+      </p:sp>
+      <p:sp>
+        <p:nvSpPr>
+          <p:cNvPr id="52" name="TextBox 51"/>
+          <p:cNvSpPr txBox="1"/>
+          <p:nvPr/>
+        </p:nvSpPr>
+        <p:spPr>
+          <a:xfrm>
+            <a:off x="8074152" y="2788920"/>
+            <a:ext cx="2999232" cy="182880"/>
+          </a:xfrm>
+          <a:prstGeom prst="rect">
+            <a:avLst/>
+          </a:prstGeom>
+          <a:noFill/>
+        </p:spPr>
+        <p:txBody>
+          <a:bodyPr wrap="square" lIns="18288" tIns="18288" rIns="18288" bIns="18288" anchor="t">
+            <a:spAutoFit/>
+          </a:bodyPr>
+          <a:lstStyle/>
+          <a:p>
+            <a:pPr algn="l"/>
+            <a:r>
+              <a:rPr sz="1100" b="0" i="0">
+                <a:solidFill>
+                  <a:srgbClr val="A0AEC6"/>
+                </a:solidFill>
+                <a:latin typeface="Aptos"/>
+              </a:rPr>
+              <a:t>At-a-glance hardware profile and key metrics.</a:t>
+            </a:r>
+          </a:p>
+        </p:txBody>
+      </p:sp>
+      <p:sp>
+        <p:nvSpPr>
+          <p:cNvPr id="53" name="Rounded Rectangle 52"/>
+          <p:cNvSpPr/>
+          <p:nvPr/>
+        </p:nvSpPr>
+        <p:spPr>
+          <a:xfrm>
+            <a:off x="7726679" y="3337560"/>
+            <a:ext cx="3566160" cy="960120"/>
+          </a:xfrm>
+          <a:prstGeom prst="roundRect">
+            <a:avLst>
+              <a:gd name="adj" fmla="val 12000"/>
+            </a:avLst>
+          </a:prstGeom>
+          <a:solidFill>
+            <a:srgbClr val="141C2F"/>
+          </a:solidFill>
+          <a:ln>
+            <a:solidFill>
+              <a:srgbClr val="313F59"/>
+            </a:solidFill>
+          </a:ln>
+        </p:spPr>
+        <p:style>
+          <a:lnRef idx="1">
+            <a:schemeClr val="accent1"/>
+          </a:lnRef>
+          <a:fillRef idx="3">
+            <a:schemeClr val="accent1"/>
+          </a:fillRef>
+          <a:effectRef idx="2">
+            <a:schemeClr val="accent1"/>
+          </a:effectRef>
+          <a:fontRef idx="minor">
+            <a:schemeClr val="lt1"/>
+          </a:fontRef>
+        </p:style>
+        <p:txBody>
+          <a:bodyPr rtlCol="0" anchor="ctr"/>
+          <a:lstStyle/>
+          <a:p>
+            <a:pPr algn="ctr"/>
+            <a:endParaRPr/>
+          </a:p>
+        </p:txBody>
+      </p:sp>
+      <p:sp>
+        <p:nvSpPr>
+          <p:cNvPr id="54" name="Rectangle 53"/>
+          <p:cNvSpPr/>
+          <p:nvPr/>
+        </p:nvSpPr>
+        <p:spPr>
+          <a:xfrm>
+            <a:off x="7891271" y="3538728"/>
+            <a:ext cx="41148" cy="557784"/>
+          </a:xfrm>
+          <a:prstGeom prst="rect">
+            <a:avLst/>
+          </a:prstGeom>
+          <a:solidFill>
+            <a:srgbClr val="5780FF"/>
+          </a:solidFill>
+          <a:ln>
+            <a:solidFill>
+              <a:srgbClr val="5780FF"/>
+            </a:solidFill>
+          </a:ln>
+        </p:spPr>
+        <p:style>
+          <a:lnRef idx="1">
+            <a:schemeClr val="accent1"/>
+          </a:lnRef>
+          <a:fillRef idx="3">
+            <a:schemeClr val="accent1"/>
+          </a:fillRef>
+          <a:effectRef idx="2">
+            <a:schemeClr val="accent1"/>
+          </a:effectRef>
+          <a:fontRef idx="minor">
+            <a:schemeClr val="lt1"/>
+          </a:fontRef>
+        </p:style>
+        <p:txBody>
+          <a:bodyPr rtlCol="0" anchor="ctr"/>
+          <a:lstStyle/>
+          <a:p>
+            <a:pPr algn="ctr"/>
+            <a:endParaRPr/>
+          </a:p>
+        </p:txBody>
+      </p:sp>
+      <p:sp>
+        <p:nvSpPr>
+          <p:cNvPr id="55" name="TextBox 54"/>
+          <p:cNvSpPr txBox="1"/>
+          <p:nvPr/>
+        </p:nvSpPr>
+        <p:spPr>
+          <a:xfrm>
+            <a:off x="8074152" y="3538728"/>
+            <a:ext cx="3017520" cy="320040"/>
+          </a:xfrm>
+          <a:prstGeom prst="rect">
+            <a:avLst/>
+          </a:prstGeom>
+          <a:noFill/>
+        </p:spPr>
+        <p:txBody>
+          <a:bodyPr wrap="square" lIns="18288" tIns="18288" rIns="18288" bIns="18288" anchor="t">
+            <a:spAutoFit/>
+          </a:bodyPr>
+          <a:lstStyle/>
+          <a:p>
+            <a:pPr algn="l"/>
+            <a:r>
+              <a:rPr sz="1600" b="1" i="0">
+                <a:solidFill>
+                  <a:srgbClr val="F2F6FF"/>
+                </a:solidFill>
+                <a:latin typeface="Aptos"/>
+              </a:rPr>
+              <a:t>Visual hierarchy</a:t>
+            </a:r>
+          </a:p>
+        </p:txBody>
+      </p:sp>
+      <p:sp>
+        <p:nvSpPr>
+          <p:cNvPr id="56" name="TextBox 55"/>
+          <p:cNvSpPr txBox="1"/>
+          <p:nvPr/>
+        </p:nvSpPr>
+        <p:spPr>
+          <a:xfrm>
+            <a:off x="8074152" y="3977639"/>
+            <a:ext cx="2999232" cy="182880"/>
+          </a:xfrm>
+          <a:prstGeom prst="rect">
+            <a:avLst/>
+          </a:prstGeom>
+          <a:noFill/>
+        </p:spPr>
+        <p:txBody>
+          <a:bodyPr wrap="square" lIns="18288" tIns="18288" rIns="18288" bIns="18288" anchor="t">
+            <a:spAutoFit/>
+          </a:bodyPr>
+          <a:lstStyle/>
+          <a:p>
+            <a:pPr algn="l"/>
+            <a:r>
+              <a:rPr sz="1100" b="0" i="0">
+                <a:solidFill>
+                  <a:srgbClr val="A0AEC6"/>
+                </a:solidFill>
+                <a:latin typeface="Aptos"/>
+              </a:rPr>
+              <a:t>Distinct sections, clear labels, and readable technical detail.</a:t>
+            </a:r>
+          </a:p>
+        </p:txBody>
+      </p:sp>
+      <p:sp>
+        <p:nvSpPr>
+          <p:cNvPr id="57" name="Rounded Rectangle 56"/>
+          <p:cNvSpPr/>
+          <p:nvPr/>
+        </p:nvSpPr>
+        <p:spPr>
+          <a:xfrm>
+            <a:off x="7726679" y="4526280"/>
+            <a:ext cx="3566160" cy="1097280"/>
+          </a:xfrm>
+          <a:prstGeom prst="roundRect">
+            <a:avLst>
+              <a:gd name="adj" fmla="val 12000"/>
+            </a:avLst>
+          </a:prstGeom>
+          <a:solidFill>
+            <a:srgbClr val="141C2F"/>
+          </a:solidFill>
+          <a:ln>
+            <a:solidFill>
+              <a:srgbClr val="313F59"/>
+            </a:solidFill>
+          </a:ln>
+        </p:spPr>
+        <p:style>
+          <a:lnRef idx="1">
+            <a:schemeClr val="accent1"/>
+          </a:lnRef>
+          <a:fillRef idx="3">
+            <a:schemeClr val="accent1"/>
+          </a:fillRef>
+          <a:effectRef idx="2">
+            <a:schemeClr val="accent1"/>
+          </a:effectRef>
+          <a:fontRef idx="minor">
+            <a:schemeClr val="lt1"/>
+          </a:fontRef>
+        </p:style>
+        <p:txBody>
+          <a:bodyPr rtlCol="0" anchor="ctr"/>
+          <a:lstStyle/>
+          <a:p>
+            <a:pPr algn="ctr"/>
+            <a:endParaRPr/>
+          </a:p>
+        </p:txBody>
+      </p:sp>
+      <p:sp>
+        <p:nvSpPr>
+          <p:cNvPr id="58" name="Rectangle 57"/>
+          <p:cNvSpPr/>
+          <p:nvPr/>
+        </p:nvSpPr>
+        <p:spPr>
+          <a:xfrm>
+            <a:off x="7891271" y="4727448"/>
+            <a:ext cx="41148" cy="557784"/>
+          </a:xfrm>
+          <a:prstGeom prst="rect">
+            <a:avLst/>
+          </a:prstGeom>
+          <a:solidFill>
+            <a:srgbClr val="FFBF5C"/>
+          </a:solidFill>
+          <a:ln>
+            <a:solidFill>
+              <a:srgbClr val="FFBF5C"/>
+            </a:solidFill>
+          </a:ln>
+        </p:spPr>
+        <p:style>
+          <a:lnRef idx="1">
+            <a:schemeClr val="accent1"/>
+          </a:lnRef>
+          <a:fillRef idx="3">
+            <a:schemeClr val="accent1"/>
+          </a:fillRef>
+          <a:effectRef idx="2">
+            <a:schemeClr val="accent1"/>
+          </a:effectRef>
+          <a:fontRef idx="minor">
+            <a:schemeClr val="lt1"/>
+          </a:fontRef>
+        </p:style>
+        <p:txBody>
+          <a:bodyPr rtlCol="0" anchor="ctr"/>
+          <a:lstStyle/>
+          <a:p>
+            <a:pPr algn="ctr"/>
+            <a:endParaRPr/>
+          </a:p>
+        </p:txBody>
+      </p:sp>
+      <p:sp>
+        <p:nvSpPr>
+          <p:cNvPr id="59" name="TextBox 58"/>
+          <p:cNvSpPr txBox="1"/>
+          <p:nvPr/>
+        </p:nvSpPr>
+        <p:spPr>
+          <a:xfrm>
+            <a:off x="8074152" y="4727448"/>
+            <a:ext cx="3017520" cy="320040"/>
+          </a:xfrm>
+          <a:prstGeom prst="rect">
+            <a:avLst/>
+          </a:prstGeom>
+          <a:noFill/>
+        </p:spPr>
+        <p:txBody>
+          <a:bodyPr wrap="square" lIns="18288" tIns="18288" rIns="18288" bIns="18288" anchor="t">
+            <a:spAutoFit/>
+          </a:bodyPr>
+          <a:lstStyle/>
+          <a:p>
+            <a:pPr algn="l"/>
+            <a:r>
+              <a:rPr sz="1600" b="1" i="0" dirty="0">
+                <a:solidFill>
+                  <a:srgbClr val="F2F6FF"/>
+                </a:solidFill>
+                <a:latin typeface="Aptos"/>
+              </a:rPr>
+              <a:t>Honest data</a:t>
+            </a:r>
+          </a:p>
+        </p:txBody>
+      </p:sp>
+      <p:sp>
+        <p:nvSpPr>
+          <p:cNvPr id="60" name="TextBox 59"/>
+          <p:cNvSpPr txBox="1"/>
+          <p:nvPr/>
+        </p:nvSpPr>
+        <p:spPr>
+          <a:xfrm>
+            <a:off x="8074152" y="5166360"/>
+            <a:ext cx="2999232" cy="182880"/>
+          </a:xfrm>
+          <a:prstGeom prst="rect">
+            <a:avLst/>
+          </a:prstGeom>
+          <a:noFill/>
+        </p:spPr>
+        <p:txBody>
+          <a:bodyPr wrap="square" lIns="18288" tIns="18288" rIns="18288" bIns="18288" anchor="t">
+            <a:spAutoFit/>
+          </a:bodyPr>
+          <a:lstStyle/>
+          <a:p>
+            <a:pPr algn="l"/>
+            <a:r>
+              <a:rPr sz="1100" b="0" i="0">
+                <a:solidFill>
+                  <a:srgbClr val="A0AEC6"/>
+                </a:solidFill>
+                <a:latin typeface="Aptos"/>
+              </a:rPr>
+              <a:t>Only verified values; unavailable fields are explicitly marked.</a:t>
             </a:r>
           </a:p>
         </p:txBody>
       </p:sp>
       <p:pic>
         <p:nvPicPr>
-          <p:cNvPr id="96" name="Picture 95">
+          <p:cNvPr id="62" name="Picture 61">
             <a:extLst>
               <a:ext uri="{FF2B5EF4-FFF2-40B4-BE49-F238E27FC236}">
-                <a16:creationId xmlns:a16="http://schemas.microsoft.com/office/drawing/2014/main" id="{C79A1060-C14C-65D2-03E6-A940A27C09A1}"/>
+                <a16:creationId xmlns:a16="http://schemas.microsoft.com/office/drawing/2014/main" id="{867959E3-1133-148A-DCF8-A18584F19E45}"/>
               </a:ext>
             </a:extLst>
           </p:cNvPr>
@@ -4623,68 +5463,8 @@
         </p:blipFill>
         <p:spPr>
           <a:xfrm>
-            <a:off x="734742" y="1220111"/>
-            <a:ext cx="5040791" cy="4684105"/>
-          </a:xfrm>
-          <a:prstGeom prst="rect">
-            <a:avLst/>
-          </a:prstGeom>
-          <a:solidFill>
-            <a:srgbClr val="FFFFFF">
-              <a:shade val="85000"/>
-            </a:srgbClr>
-          </a:solidFill>
-          <a:ln w="88900" cap="sq">
-            <a:solidFill>
-              <a:srgbClr val="FFFFFF"/>
-            </a:solidFill>
-            <a:miter lim="800000"/>
-          </a:ln>
-          <a:effectLst>
-            <a:outerShdw blurRad="55000" dist="18000" dir="5400000" algn="tl" rotWithShape="0">
-              <a:srgbClr val="000000">
-                <a:alpha val="40000"/>
-              </a:srgbClr>
-            </a:outerShdw>
-          </a:effectLst>
-          <a:scene3d>
-            <a:camera prst="orthographicFront"/>
-            <a:lightRig rig="twoPt" dir="t">
-              <a:rot lat="0" lon="0" rev="7200000"/>
-            </a:lightRig>
-          </a:scene3d>
-          <a:sp3d>
-            <a:bevelT w="25400" h="19050"/>
-            <a:contourClr>
-              <a:srgbClr val="FFFFFF"/>
-            </a:contourClr>
-          </a:sp3d>
-        </p:spPr>
-      </p:pic>
-      <p:pic>
-        <p:nvPicPr>
-          <p:cNvPr id="98" name="Picture 97">
-            <a:extLst>
-              <a:ext uri="{FF2B5EF4-FFF2-40B4-BE49-F238E27FC236}">
-                <a16:creationId xmlns:a16="http://schemas.microsoft.com/office/drawing/2014/main" id="{DE3310D6-555C-42F1-1CB3-8E82A0C0FBD0}"/>
-              </a:ext>
-            </a:extLst>
-          </p:cNvPr>
-          <p:cNvPicPr>
-            <a:picLocks noChangeAspect="1"/>
-          </p:cNvPicPr>
-          <p:nvPr/>
-        </p:nvPicPr>
-        <p:blipFill>
-          <a:blip r:embed="rId3"/>
-          <a:stretch>
-            <a:fillRect/>
-          </a:stretch>
-        </p:blipFill>
-        <p:spPr>
-          <a:xfrm>
-            <a:off x="6031219" y="1228995"/>
-            <a:ext cx="6095364" cy="4684105"/>
+            <a:off x="886762" y="1896608"/>
+            <a:ext cx="6080808" cy="4141407"/>
           </a:xfrm>
           <a:prstGeom prst="rect">
             <a:avLst/>
@@ -4784,7 +5564,7 @@
                 </a:solidFill>
                 <a:latin typeface="Aptos"/>
               </a:rPr>
-              <a:t>10 / QUALITY</a:t>
+              <a:t>09 / PRODUCT VISUALS</a:t>
             </a:r>
           </a:p>
         </p:txBody>
@@ -4819,42 +5599,7 @@
                 </a:solidFill>
                 <a:latin typeface="Aptos"/>
               </a:rPr>
-              <a:t>Accuracy is a product feature</a:t>
-            </a:r>
-          </a:p>
-        </p:txBody>
-      </p:sp>
-      <p:sp>
-        <p:nvSpPr>
-          <p:cNvPr id="4" name="TextBox 3"/>
-          <p:cNvSpPr txBox="1"/>
-          <p:nvPr/>
-        </p:nvSpPr>
-        <p:spPr>
-          <a:xfrm>
-            <a:off x="621792" y="1234440"/>
-            <a:ext cx="10881360" cy="411480"/>
-          </a:xfrm>
-          <a:prstGeom prst="rect">
-            <a:avLst/>
-          </a:prstGeom>
-          <a:noFill/>
-        </p:spPr>
-        <p:txBody>
-          <a:bodyPr wrap="square" lIns="18288" tIns="18288" rIns="18288" bIns="18288" anchor="t">
-            <a:spAutoFit/>
-          </a:bodyPr>
-          <a:lstStyle/>
-          <a:p>
-            <a:pPr algn="l"/>
-            <a:r>
-              <a:rPr sz="1200" b="0" i="0">
-                <a:solidFill>
-                  <a:srgbClr val="A0AEC6"/>
-                </a:solidFill>
-                <a:latin typeface="Aptos"/>
-              </a:rPr>
-              <a:t>A modern interface is only valuable when the underlying values are trustworthy.</a:t>
+              <a:t>Explore the details</a:t>
             </a:r>
           </a:p>
         </p:txBody>
@@ -4867,7 +5612,7 @@
         </p:nvSpPr>
         <p:spPr>
           <a:xfrm>
-            <a:off x="594360" y="1719072"/>
+            <a:off x="603238" y="1115393"/>
             <a:ext cx="10972800" cy="13716"/>
           </a:xfrm>
           <a:prstGeom prst="rect">
@@ -4935,7 +5680,7 @@
                 </a:solidFill>
                 <a:latin typeface="Aptos"/>
               </a:rPr>
-              <a:t>12</a:t>
+              <a:t>11</a:t>
             </a:r>
           </a:p>
         </p:txBody>
@@ -4977,634 +5722,194 @@
       </p:sp>
       <p:sp>
         <p:nvSpPr>
-          <p:cNvPr id="8" name="Rounded Rectangle 7"/>
-          <p:cNvSpPr/>
-          <p:nvPr/>
-        </p:nvSpPr>
-        <p:spPr>
-          <a:xfrm>
-            <a:off x="731520" y="2057400"/>
-            <a:ext cx="3429000" cy="1417320"/>
-          </a:xfrm>
-          <a:prstGeom prst="roundRect">
-            <a:avLst>
-              <a:gd name="adj" fmla="val 12000"/>
-            </a:avLst>
+          <p:cNvPr id="92" name="TextBox 91"/>
+          <p:cNvSpPr txBox="1"/>
+          <p:nvPr/>
+        </p:nvSpPr>
+        <p:spPr>
+          <a:xfrm>
+            <a:off x="2586956" y="6123373"/>
+            <a:ext cx="2286000" cy="236988"/>
+          </a:xfrm>
+          <a:prstGeom prst="rect">
+            <a:avLst/>
+          </a:prstGeom>
+          <a:noFill/>
+        </p:spPr>
+        <p:txBody>
+          <a:bodyPr wrap="square" lIns="18288" tIns="18288" rIns="18288" bIns="18288" anchor="t">
+            <a:spAutoFit/>
+          </a:bodyPr>
+          <a:lstStyle/>
+          <a:p>
+            <a:pPr algn="l"/>
+            <a:r>
+              <a:rPr sz="1300" b="1" i="0" dirty="0">
+                <a:solidFill>
+                  <a:srgbClr val="3FDAE8"/>
+                </a:solidFill>
+                <a:latin typeface="Aptos"/>
+              </a:rPr>
+              <a:t>CPU</a:t>
+            </a:r>
+          </a:p>
+        </p:txBody>
+      </p:sp>
+      <p:sp>
+        <p:nvSpPr>
+          <p:cNvPr id="93" name="TextBox 92"/>
+          <p:cNvSpPr txBox="1"/>
+          <p:nvPr/>
+        </p:nvSpPr>
+        <p:spPr>
+          <a:xfrm>
+            <a:off x="8522564" y="6132256"/>
+            <a:ext cx="2286000" cy="236988"/>
+          </a:xfrm>
+          <a:prstGeom prst="rect">
+            <a:avLst/>
+          </a:prstGeom>
+          <a:noFill/>
+        </p:spPr>
+        <p:txBody>
+          <a:bodyPr wrap="square" lIns="18288" tIns="18288" rIns="18288" bIns="18288" anchor="t">
+            <a:spAutoFit/>
+          </a:bodyPr>
+          <a:lstStyle/>
+          <a:p>
+            <a:pPr algn="l"/>
+            <a:r>
+              <a:rPr sz="1300" b="1" i="0" dirty="0">
+                <a:solidFill>
+                  <a:srgbClr val="9E71FF"/>
+                </a:solidFill>
+                <a:latin typeface="Aptos"/>
+              </a:rPr>
+              <a:t>Memory</a:t>
+            </a:r>
+          </a:p>
+        </p:txBody>
+      </p:sp>
+      <p:pic>
+        <p:nvPicPr>
+          <p:cNvPr id="96" name="Picture 95">
+            <a:extLst>
+              <a:ext uri="{FF2B5EF4-FFF2-40B4-BE49-F238E27FC236}">
+                <a16:creationId xmlns:a16="http://schemas.microsoft.com/office/drawing/2014/main" id="{C79A1060-C14C-65D2-03E6-A940A27C09A1}"/>
+              </a:ext>
+            </a:extLst>
+          </p:cNvPr>
+          <p:cNvPicPr>
+            <a:picLocks noChangeAspect="1"/>
+          </p:cNvPicPr>
+          <p:nvPr/>
+        </p:nvPicPr>
+        <p:blipFill>
+          <a:blip r:embed="rId2"/>
+          <a:stretch>
+            <a:fillRect/>
+          </a:stretch>
+        </p:blipFill>
+        <p:spPr>
+          <a:xfrm>
+            <a:off x="734742" y="1220111"/>
+            <a:ext cx="5040791" cy="4684105"/>
+          </a:xfrm>
+          <a:prstGeom prst="rect">
+            <a:avLst/>
           </a:prstGeom>
           <a:solidFill>
-            <a:srgbClr val="141C2F"/>
+            <a:srgbClr val="FFFFFF">
+              <a:shade val="85000"/>
+            </a:srgbClr>
           </a:solidFill>
-          <a:ln>
+          <a:ln w="88900" cap="sq">
             <a:solidFill>
-              <a:srgbClr val="313F59"/>
+              <a:srgbClr val="FFFFFF"/>
             </a:solidFill>
+            <a:miter lim="800000"/>
           </a:ln>
-        </p:spPr>
-        <p:style>
-          <a:lnRef idx="1">
-            <a:schemeClr val="accent1"/>
-          </a:lnRef>
-          <a:fillRef idx="3">
-            <a:schemeClr val="accent1"/>
-          </a:fillRef>
-          <a:effectRef idx="2">
-            <a:schemeClr val="accent1"/>
-          </a:effectRef>
-          <a:fontRef idx="minor">
-            <a:schemeClr val="lt1"/>
-          </a:fontRef>
-        </p:style>
-        <p:txBody>
-          <a:bodyPr rtlCol="0" anchor="ctr"/>
-          <a:lstStyle/>
-          <a:p>
-            <a:pPr algn="ctr"/>
-            <a:endParaRPr/>
-          </a:p>
-        </p:txBody>
-      </p:sp>
-      <p:sp>
-        <p:nvSpPr>
-          <p:cNvPr id="9" name="Rectangle 8"/>
-          <p:cNvSpPr/>
-          <p:nvPr/>
-        </p:nvSpPr>
-        <p:spPr>
-          <a:xfrm>
-            <a:off x="896112" y="2258568"/>
-            <a:ext cx="41148" cy="1014984"/>
+          <a:effectLst>
+            <a:outerShdw blurRad="55000" dist="18000" dir="5400000" algn="tl" rotWithShape="0">
+              <a:srgbClr val="000000">
+                <a:alpha val="40000"/>
+              </a:srgbClr>
+            </a:outerShdw>
+          </a:effectLst>
+          <a:scene3d>
+            <a:camera prst="orthographicFront"/>
+            <a:lightRig rig="twoPt" dir="t">
+              <a:rot lat="0" lon="0" rev="7200000"/>
+            </a:lightRig>
+          </a:scene3d>
+          <a:sp3d>
+            <a:bevelT w="25400" h="19050"/>
+            <a:contourClr>
+              <a:srgbClr val="FFFFFF"/>
+            </a:contourClr>
+          </a:sp3d>
+        </p:spPr>
+      </p:pic>
+      <p:pic>
+        <p:nvPicPr>
+          <p:cNvPr id="98" name="Picture 97">
+            <a:extLst>
+              <a:ext uri="{FF2B5EF4-FFF2-40B4-BE49-F238E27FC236}">
+                <a16:creationId xmlns:a16="http://schemas.microsoft.com/office/drawing/2014/main" id="{DE3310D6-555C-42F1-1CB3-8E82A0C0FBD0}"/>
+              </a:ext>
+            </a:extLst>
+          </p:cNvPr>
+          <p:cNvPicPr>
+            <a:picLocks noChangeAspect="1"/>
+          </p:cNvPicPr>
+          <p:nvPr/>
+        </p:nvPicPr>
+        <p:blipFill>
+          <a:blip r:embed="rId3"/>
+          <a:stretch>
+            <a:fillRect/>
+          </a:stretch>
+        </p:blipFill>
+        <p:spPr>
+          <a:xfrm>
+            <a:off x="6031219" y="1228995"/>
+            <a:ext cx="6095364" cy="4684105"/>
           </a:xfrm>
           <a:prstGeom prst="rect">
             <a:avLst/>
           </a:prstGeom>
           <a:solidFill>
-            <a:srgbClr val="3FDAE8"/>
+            <a:srgbClr val="FFFFFF">
+              <a:shade val="85000"/>
+            </a:srgbClr>
           </a:solidFill>
-          <a:ln>
+          <a:ln w="88900" cap="sq">
             <a:solidFill>
-              <a:srgbClr val="3FDAE8"/>
+              <a:srgbClr val="FFFFFF"/>
             </a:solidFill>
+            <a:miter lim="800000"/>
           </a:ln>
-        </p:spPr>
-        <p:style>
-          <a:lnRef idx="1">
-            <a:schemeClr val="accent1"/>
-          </a:lnRef>
-          <a:fillRef idx="3">
-            <a:schemeClr val="accent1"/>
-          </a:fillRef>
-          <a:effectRef idx="2">
-            <a:schemeClr val="accent1"/>
-          </a:effectRef>
-          <a:fontRef idx="minor">
-            <a:schemeClr val="lt1"/>
-          </a:fontRef>
-        </p:style>
-        <p:txBody>
-          <a:bodyPr rtlCol="0" anchor="ctr"/>
-          <a:lstStyle/>
-          <a:p>
-            <a:pPr algn="ctr"/>
-            <a:endParaRPr/>
-          </a:p>
-        </p:txBody>
-      </p:sp>
-      <p:sp>
-        <p:nvSpPr>
-          <p:cNvPr id="10" name="TextBox 9"/>
-          <p:cNvSpPr txBox="1"/>
-          <p:nvPr/>
-        </p:nvSpPr>
-        <p:spPr>
-          <a:xfrm>
-            <a:off x="1078992" y="2258568"/>
-            <a:ext cx="2880360" cy="320040"/>
-          </a:xfrm>
-          <a:prstGeom prst="rect">
-            <a:avLst/>
-          </a:prstGeom>
-          <a:noFill/>
-        </p:spPr>
-        <p:txBody>
-          <a:bodyPr wrap="square" lIns="18288" tIns="18288" rIns="18288" bIns="18288" anchor="t">
-            <a:spAutoFit/>
-          </a:bodyPr>
-          <a:lstStyle/>
-          <a:p>
-            <a:pPr algn="l"/>
-            <a:r>
-              <a:rPr sz="1600" b="1" i="0">
-                <a:solidFill>
-                  <a:srgbClr val="F2F6FF"/>
-                </a:solidFill>
-                <a:latin typeface="Aptos"/>
-              </a:rPr>
-              <a:t>Evidence-first</a:t>
-            </a:r>
-          </a:p>
-        </p:txBody>
-      </p:sp>
-      <p:sp>
-        <p:nvSpPr>
-          <p:cNvPr id="11" name="TextBox 10"/>
-          <p:cNvSpPr txBox="1"/>
-          <p:nvPr/>
-        </p:nvSpPr>
-        <p:spPr>
-          <a:xfrm>
-            <a:off x="1078992" y="2697480"/>
-            <a:ext cx="2862072" cy="640080"/>
-          </a:xfrm>
-          <a:prstGeom prst="rect">
-            <a:avLst/>
-          </a:prstGeom>
-          <a:noFill/>
-        </p:spPr>
-        <p:txBody>
-          <a:bodyPr wrap="square" lIns="18288" tIns="18288" rIns="18288" bIns="18288" anchor="t">
-            <a:spAutoFit/>
-          </a:bodyPr>
-          <a:lstStyle/>
-          <a:p>
-            <a:pPr algn="l"/>
-            <a:r>
-              <a:rPr sz="1300" b="0" i="0">
-                <a:solidFill>
-                  <a:srgbClr val="A0AEC6"/>
-                </a:solidFill>
-                <a:latin typeface="Aptos"/>
-              </a:rPr>
-              <a:t>Trace fields through REA/Ghidra and record the supporting evidence.</a:t>
-            </a:r>
-          </a:p>
-        </p:txBody>
-      </p:sp>
-      <p:sp>
-        <p:nvSpPr>
-          <p:cNvPr id="12" name="Rounded Rectangle 11"/>
-          <p:cNvSpPr/>
-          <p:nvPr/>
-        </p:nvSpPr>
-        <p:spPr>
-          <a:xfrm>
-            <a:off x="4389120" y="2057400"/>
-            <a:ext cx="3429000" cy="1417320"/>
-          </a:xfrm>
-          <a:prstGeom prst="roundRect">
-            <a:avLst>
-              <a:gd name="adj" fmla="val 12000"/>
-            </a:avLst>
-          </a:prstGeom>
-          <a:solidFill>
-            <a:srgbClr val="141C2F"/>
-          </a:solidFill>
-          <a:ln>
-            <a:solidFill>
-              <a:srgbClr val="313F59"/>
-            </a:solidFill>
-          </a:ln>
-        </p:spPr>
-        <p:style>
-          <a:lnRef idx="1">
-            <a:schemeClr val="accent1"/>
-          </a:lnRef>
-          <a:fillRef idx="3">
-            <a:schemeClr val="accent1"/>
-          </a:fillRef>
-          <a:effectRef idx="2">
-            <a:schemeClr val="accent1"/>
-          </a:effectRef>
-          <a:fontRef idx="minor">
-            <a:schemeClr val="lt1"/>
-          </a:fontRef>
-        </p:style>
-        <p:txBody>
-          <a:bodyPr rtlCol="0" anchor="ctr"/>
-          <a:lstStyle/>
-          <a:p>
-            <a:pPr algn="ctr"/>
-            <a:endParaRPr/>
-          </a:p>
-        </p:txBody>
-      </p:sp>
-      <p:sp>
-        <p:nvSpPr>
-          <p:cNvPr id="13" name="Rectangle 12"/>
-          <p:cNvSpPr/>
-          <p:nvPr/>
-        </p:nvSpPr>
-        <p:spPr>
-          <a:xfrm>
-            <a:off x="4553712" y="2258568"/>
-            <a:ext cx="41148" cy="1014984"/>
-          </a:xfrm>
-          <a:prstGeom prst="rect">
-            <a:avLst/>
-          </a:prstGeom>
-          <a:solidFill>
-            <a:srgbClr val="FFBF5C"/>
-          </a:solidFill>
-          <a:ln>
-            <a:solidFill>
-              <a:srgbClr val="FFBF5C"/>
-            </a:solidFill>
-          </a:ln>
-        </p:spPr>
-        <p:style>
-          <a:lnRef idx="1">
-            <a:schemeClr val="accent1"/>
-          </a:lnRef>
-          <a:fillRef idx="3">
-            <a:schemeClr val="accent1"/>
-          </a:fillRef>
-          <a:effectRef idx="2">
-            <a:schemeClr val="accent1"/>
-          </a:effectRef>
-          <a:fontRef idx="minor">
-            <a:schemeClr val="lt1"/>
-          </a:fontRef>
-        </p:style>
-        <p:txBody>
-          <a:bodyPr rtlCol="0" anchor="ctr"/>
-          <a:lstStyle/>
-          <a:p>
-            <a:pPr algn="ctr"/>
-            <a:endParaRPr/>
-          </a:p>
-        </p:txBody>
-      </p:sp>
-      <p:sp>
-        <p:nvSpPr>
-          <p:cNvPr id="14" name="TextBox 13"/>
-          <p:cNvSpPr txBox="1"/>
-          <p:nvPr/>
-        </p:nvSpPr>
-        <p:spPr>
-          <a:xfrm>
-            <a:off x="4736592" y="2258568"/>
-            <a:ext cx="2880360" cy="320040"/>
-          </a:xfrm>
-          <a:prstGeom prst="rect">
-            <a:avLst/>
-          </a:prstGeom>
-          <a:noFill/>
-        </p:spPr>
-        <p:txBody>
-          <a:bodyPr wrap="square" lIns="18288" tIns="18288" rIns="18288" bIns="18288" anchor="t">
-            <a:spAutoFit/>
-          </a:bodyPr>
-          <a:lstStyle/>
-          <a:p>
-            <a:pPr algn="l"/>
-            <a:r>
-              <a:rPr sz="1600" b="1" i="0">
-                <a:solidFill>
-                  <a:srgbClr val="F2F6FF"/>
-                </a:solidFill>
-                <a:latin typeface="Aptos"/>
-              </a:rPr>
-              <a:t>No guessed formulas</a:t>
-            </a:r>
-          </a:p>
-        </p:txBody>
-      </p:sp>
-      <p:sp>
-        <p:nvSpPr>
-          <p:cNvPr id="15" name="TextBox 14"/>
-          <p:cNvSpPr txBox="1"/>
-          <p:nvPr/>
-        </p:nvSpPr>
-        <p:spPr>
-          <a:xfrm>
-            <a:off x="4736592" y="2697480"/>
-            <a:ext cx="2862072" cy="640080"/>
-          </a:xfrm>
-          <a:prstGeom prst="rect">
-            <a:avLst/>
-          </a:prstGeom>
-          <a:noFill/>
-        </p:spPr>
-        <p:txBody>
-          <a:bodyPr wrap="square" lIns="18288" tIns="18288" rIns="18288" bIns="18288" anchor="t">
-            <a:spAutoFit/>
-          </a:bodyPr>
-          <a:lstStyle/>
-          <a:p>
-            <a:pPr algn="l"/>
-            <a:r>
-              <a:rPr sz="1300" b="0" i="0">
-                <a:solidFill>
-                  <a:srgbClr val="A0AEC6"/>
-                </a:solidFill>
-                <a:latin typeface="Aptos"/>
-              </a:rPr>
-              <a:t>Unknown calculation methods stay documented as unknown—not silently approximated.</a:t>
-            </a:r>
-          </a:p>
-        </p:txBody>
-      </p:sp>
-      <p:sp>
-        <p:nvSpPr>
-          <p:cNvPr id="16" name="Rounded Rectangle 15"/>
-          <p:cNvSpPr/>
-          <p:nvPr/>
-        </p:nvSpPr>
-        <p:spPr>
-          <a:xfrm>
-            <a:off x="8046720" y="2057400"/>
-            <a:ext cx="3429000" cy="1417320"/>
-          </a:xfrm>
-          <a:prstGeom prst="roundRect">
-            <a:avLst>
-              <a:gd name="adj" fmla="val 12000"/>
-            </a:avLst>
-          </a:prstGeom>
-          <a:solidFill>
-            <a:srgbClr val="141C2F"/>
-          </a:solidFill>
-          <a:ln>
-            <a:solidFill>
-              <a:srgbClr val="313F59"/>
-            </a:solidFill>
-          </a:ln>
-        </p:spPr>
-        <p:style>
-          <a:lnRef idx="1">
-            <a:schemeClr val="accent1"/>
-          </a:lnRef>
-          <a:fillRef idx="3">
-            <a:schemeClr val="accent1"/>
-          </a:fillRef>
-          <a:effectRef idx="2">
-            <a:schemeClr val="accent1"/>
-          </a:effectRef>
-          <a:fontRef idx="minor">
-            <a:schemeClr val="lt1"/>
-          </a:fontRef>
-        </p:style>
-        <p:txBody>
-          <a:bodyPr rtlCol="0" anchor="ctr"/>
-          <a:lstStyle/>
-          <a:p>
-            <a:pPr algn="ctr"/>
-            <a:endParaRPr/>
-          </a:p>
-        </p:txBody>
-      </p:sp>
-      <p:sp>
-        <p:nvSpPr>
-          <p:cNvPr id="17" name="Rectangle 16"/>
-          <p:cNvSpPr/>
-          <p:nvPr/>
-        </p:nvSpPr>
-        <p:spPr>
-          <a:xfrm>
-            <a:off x="8211312" y="2258568"/>
-            <a:ext cx="41148" cy="1014984"/>
-          </a:xfrm>
-          <a:prstGeom prst="rect">
-            <a:avLst/>
-          </a:prstGeom>
-          <a:solidFill>
-            <a:srgbClr val="4EDDA3"/>
-          </a:solidFill>
-          <a:ln>
-            <a:solidFill>
-              <a:srgbClr val="4EDDA3"/>
-            </a:solidFill>
-          </a:ln>
-        </p:spPr>
-        <p:style>
-          <a:lnRef idx="1">
-            <a:schemeClr val="accent1"/>
-          </a:lnRef>
-          <a:fillRef idx="3">
-            <a:schemeClr val="accent1"/>
-          </a:fillRef>
-          <a:effectRef idx="2">
-            <a:schemeClr val="accent1"/>
-          </a:effectRef>
-          <a:fontRef idx="minor">
-            <a:schemeClr val="lt1"/>
-          </a:fontRef>
-        </p:style>
-        <p:txBody>
-          <a:bodyPr rtlCol="0" anchor="ctr"/>
-          <a:lstStyle/>
-          <a:p>
-            <a:pPr algn="ctr"/>
-            <a:endParaRPr/>
-          </a:p>
-        </p:txBody>
-      </p:sp>
-      <p:sp>
-        <p:nvSpPr>
-          <p:cNvPr id="18" name="TextBox 17"/>
-          <p:cNvSpPr txBox="1"/>
-          <p:nvPr/>
-        </p:nvSpPr>
-        <p:spPr>
-          <a:xfrm>
-            <a:off x="8394192" y="2258568"/>
-            <a:ext cx="2880360" cy="320040"/>
-          </a:xfrm>
-          <a:prstGeom prst="rect">
-            <a:avLst/>
-          </a:prstGeom>
-          <a:noFill/>
-        </p:spPr>
-        <p:txBody>
-          <a:bodyPr wrap="square" lIns="18288" tIns="18288" rIns="18288" bIns="18288" anchor="t">
-            <a:spAutoFit/>
-          </a:bodyPr>
-          <a:lstStyle/>
-          <a:p>
-            <a:pPr algn="l"/>
-            <a:r>
-              <a:rPr sz="1600" b="1" i="0">
-                <a:solidFill>
-                  <a:srgbClr val="F2F6FF"/>
-                </a:solidFill>
-                <a:latin typeface="Aptos"/>
-              </a:rPr>
-              <a:t>Validation</a:t>
-            </a:r>
-          </a:p>
-        </p:txBody>
-      </p:sp>
-      <p:sp>
-        <p:nvSpPr>
-          <p:cNvPr id="19" name="TextBox 18"/>
-          <p:cNvSpPr txBox="1"/>
-          <p:nvPr/>
-        </p:nvSpPr>
-        <p:spPr>
-          <a:xfrm>
-            <a:off x="8394192" y="2697480"/>
-            <a:ext cx="2862072" cy="640080"/>
-          </a:xfrm>
-          <a:prstGeom prst="rect">
-            <a:avLst/>
-          </a:prstGeom>
-          <a:noFill/>
-        </p:spPr>
-        <p:txBody>
-          <a:bodyPr wrap="square" lIns="18288" tIns="18288" rIns="18288" bIns="18288" anchor="t">
-            <a:spAutoFit/>
-          </a:bodyPr>
-          <a:lstStyle/>
-          <a:p>
-            <a:pPr algn="l"/>
-            <a:r>
-              <a:rPr sz="1300" b="0" i="0">
-                <a:solidFill>
-                  <a:srgbClr val="A0AEC6"/>
-                </a:solidFill>
-                <a:latin typeface="Aptos"/>
-              </a:rPr>
-              <a:t>Compare outputs with CPU-Z on the same machine where practical.</a:t>
-            </a:r>
-          </a:p>
-        </p:txBody>
-      </p:sp>
-      <p:sp>
-        <p:nvSpPr>
-          <p:cNvPr id="20" name="TextBox 19"/>
-          <p:cNvSpPr txBox="1"/>
-          <p:nvPr/>
-        </p:nvSpPr>
-        <p:spPr>
-          <a:xfrm>
-            <a:off x="777240" y="4160520"/>
-            <a:ext cx="2286000" cy="274320"/>
-          </a:xfrm>
-          <a:prstGeom prst="rect">
-            <a:avLst/>
-          </a:prstGeom>
-          <a:noFill/>
-        </p:spPr>
-        <p:txBody>
-          <a:bodyPr wrap="square" lIns="18288" tIns="18288" rIns="18288" bIns="18288" anchor="t">
-            <a:spAutoFit/>
-          </a:bodyPr>
-          <a:lstStyle/>
-          <a:p>
-            <a:pPr algn="l"/>
-            <a:r>
-              <a:rPr sz="1400" b="1" i="0">
-                <a:solidFill>
-                  <a:srgbClr val="3FDAE8"/>
-                </a:solidFill>
-                <a:latin typeface="Aptos"/>
-              </a:rPr>
-              <a:t>Definition of done</a:t>
-            </a:r>
-          </a:p>
-        </p:txBody>
-      </p:sp>
-      <p:sp>
-        <p:nvSpPr>
-          <p:cNvPr id="21" name="TextBox 20"/>
-          <p:cNvSpPr txBox="1"/>
-          <p:nvPr/>
-        </p:nvSpPr>
-        <p:spPr>
-          <a:xfrm>
-            <a:off x="868680" y="4526280"/>
-            <a:ext cx="10241280" cy="1508760"/>
-          </a:xfrm>
-          <a:prstGeom prst="rect">
-            <a:avLst/>
-          </a:prstGeom>
-          <a:noFill/>
-        </p:spPr>
-        <p:txBody>
-          <a:bodyPr wrap="square" lIns="27432" tIns="27432" rIns="27432" bIns="18288">
-            <a:spAutoFit/>
-          </a:bodyPr>
-          <a:lstStyle/>
-          <a:p>
-            <a:pPr>
-              <a:spcAft>
-                <a:spcPts val="500"/>
-              </a:spcAft>
-              <a:defRPr sz="1300">
-                <a:solidFill>
-                  <a:srgbClr val="F2F6FF"/>
-                </a:solidFill>
-                <a:latin typeface="Aptos"/>
-              </a:defRPr>
-            </a:pPr>
-            <a:r>
-              <a:t>Application launches reliably and core sections work.</a:t>
-            </a:r>
-          </a:p>
-          <a:p>
-            <a:pPr>
-              <a:spcAft>
-                <a:spcPts val="500"/>
-              </a:spcAft>
-              <a:defRPr sz="1300">
-                <a:solidFill>
-                  <a:srgbClr val="F2F6FF"/>
-                </a:solidFill>
-                <a:latin typeface="Aptos"/>
-              </a:defRPr>
-            </a:pPr>
-            <a:r>
-              <a:t>Implemented fields use real providers and explicit units/status.</a:t>
-            </a:r>
-          </a:p>
-          <a:p>
-            <a:pPr>
-              <a:spcAft>
-                <a:spcPts val="500"/>
-              </a:spcAft>
-              <a:defRPr sz="1300">
-                <a:solidFill>
-                  <a:srgbClr val="F2F6FF"/>
-                </a:solidFill>
-                <a:latin typeface="Aptos"/>
-              </a:defRPr>
-            </a:pPr>
-            <a:r>
-              <a:t>Automated tests pass or remaining failures are documented.</a:t>
-            </a:r>
-          </a:p>
-          <a:p>
-            <a:pPr>
-              <a:spcAft>
-                <a:spcPts val="500"/>
-              </a:spcAft>
-              <a:defRPr sz="1300">
-                <a:solidFill>
-                  <a:srgbClr val="F2F6FF"/>
-                </a:solidFill>
-                <a:latin typeface="Aptos"/>
-              </a:defRPr>
-            </a:pPr>
-            <a:r>
-              <a:t>Coverage matrix distinguishes verified, partial, unsupported, and unknown fields.</a:t>
-            </a:r>
-          </a:p>
-          <a:p>
-            <a:pPr>
-              <a:spcAft>
-                <a:spcPts val="500"/>
-              </a:spcAft>
-              <a:defRPr sz="1300">
-                <a:solidFill>
-                  <a:srgbClr val="F2F6FF"/>
-                </a:solidFill>
-                <a:latin typeface="Aptos"/>
-              </a:defRPr>
-            </a:pPr>
-            <a:r>
-              <a:t>Original CPU-Z executable remains unchanged.</a:t>
-            </a:r>
-          </a:p>
-        </p:txBody>
-      </p:sp>
+          <a:effectLst>
+            <a:outerShdw blurRad="55000" dist="18000" dir="5400000" algn="tl" rotWithShape="0">
+              <a:srgbClr val="000000">
+                <a:alpha val="40000"/>
+              </a:srgbClr>
+            </a:outerShdw>
+          </a:effectLst>
+          <a:scene3d>
+            <a:camera prst="orthographicFront"/>
+            <a:lightRig rig="twoPt" dir="t">
+              <a:rot lat="0" lon="0" rev="7200000"/>
+            </a:lightRig>
+          </a:scene3d>
+          <a:sp3d>
+            <a:bevelT w="25400" h="19050"/>
+            <a:contourClr>
+              <a:srgbClr val="FFFFFF"/>
+            </a:contourClr>
+          </a:sp3d>
+        </p:spPr>
+      </p:pic>
     </p:spTree>
   </p:cSld>
   <p:clrMapOvr>
@@ -5646,6 +5951,890 @@
         </p:nvSpPr>
         <p:spPr>
           <a:xfrm>
+            <a:off x="594360" y="320040"/>
+            <a:ext cx="5029200" cy="228600"/>
+          </a:xfrm>
+          <a:prstGeom prst="rect">
+            <a:avLst/>
+          </a:prstGeom>
+          <a:noFill/>
+        </p:spPr>
+        <p:txBody>
+          <a:bodyPr wrap="square" lIns="18288" tIns="18288" rIns="18288" bIns="18288" anchor="t">
+            <a:spAutoFit/>
+          </a:bodyPr>
+          <a:lstStyle/>
+          <a:p>
+            <a:pPr algn="l"/>
+            <a:r>
+              <a:rPr sz="1000" b="1" i="0">
+                <a:solidFill>
+                  <a:srgbClr val="3FDAE8"/>
+                </a:solidFill>
+                <a:latin typeface="Aptos"/>
+              </a:rPr>
+              <a:t>10 / QUALITY</a:t>
+            </a:r>
+          </a:p>
+        </p:txBody>
+      </p:sp>
+      <p:sp>
+        <p:nvSpPr>
+          <p:cNvPr id="3" name="TextBox 2"/>
+          <p:cNvSpPr txBox="1"/>
+          <p:nvPr/>
+        </p:nvSpPr>
+        <p:spPr>
+          <a:xfrm>
+            <a:off x="594360" y="658368"/>
+            <a:ext cx="10972800" cy="502920"/>
+          </a:xfrm>
+          <a:prstGeom prst="rect">
+            <a:avLst/>
+          </a:prstGeom>
+          <a:noFill/>
+        </p:spPr>
+        <p:txBody>
+          <a:bodyPr wrap="square" lIns="18288" tIns="18288" rIns="18288" bIns="18288" anchor="t">
+            <a:spAutoFit/>
+          </a:bodyPr>
+          <a:lstStyle/>
+          <a:p>
+            <a:pPr algn="l"/>
+            <a:r>
+              <a:rPr sz="2700" b="1" i="0">
+                <a:solidFill>
+                  <a:srgbClr val="F2F6FF"/>
+                </a:solidFill>
+                <a:latin typeface="Aptos"/>
+              </a:rPr>
+              <a:t>Accuracy is a product feature</a:t>
+            </a:r>
+          </a:p>
+        </p:txBody>
+      </p:sp>
+      <p:sp>
+        <p:nvSpPr>
+          <p:cNvPr id="4" name="TextBox 3"/>
+          <p:cNvSpPr txBox="1"/>
+          <p:nvPr/>
+        </p:nvSpPr>
+        <p:spPr>
+          <a:xfrm>
+            <a:off x="621792" y="1234440"/>
+            <a:ext cx="10881360" cy="411480"/>
+          </a:xfrm>
+          <a:prstGeom prst="rect">
+            <a:avLst/>
+          </a:prstGeom>
+          <a:noFill/>
+        </p:spPr>
+        <p:txBody>
+          <a:bodyPr wrap="square" lIns="18288" tIns="18288" rIns="18288" bIns="18288" anchor="t">
+            <a:spAutoFit/>
+          </a:bodyPr>
+          <a:lstStyle/>
+          <a:p>
+            <a:pPr algn="l"/>
+            <a:r>
+              <a:rPr sz="1200" b="0" i="0">
+                <a:solidFill>
+                  <a:srgbClr val="A0AEC6"/>
+                </a:solidFill>
+                <a:latin typeface="Aptos"/>
+              </a:rPr>
+              <a:t>A modern interface is only valuable when the underlying values are trustworthy.</a:t>
+            </a:r>
+          </a:p>
+        </p:txBody>
+      </p:sp>
+      <p:sp>
+        <p:nvSpPr>
+          <p:cNvPr id="5" name="Rectangle 4"/>
+          <p:cNvSpPr/>
+          <p:nvPr/>
+        </p:nvSpPr>
+        <p:spPr>
+          <a:xfrm>
+            <a:off x="594360" y="1719072"/>
+            <a:ext cx="10972800" cy="13716"/>
+          </a:xfrm>
+          <a:prstGeom prst="rect">
+            <a:avLst/>
+          </a:prstGeom>
+          <a:solidFill>
+            <a:srgbClr val="313F59"/>
+          </a:solidFill>
+          <a:ln>
+            <a:solidFill>
+              <a:srgbClr val="313F59"/>
+            </a:solidFill>
+          </a:ln>
+        </p:spPr>
+        <p:style>
+          <a:lnRef idx="1">
+            <a:schemeClr val="accent1"/>
+          </a:lnRef>
+          <a:fillRef idx="3">
+            <a:schemeClr val="accent1"/>
+          </a:fillRef>
+          <a:effectRef idx="2">
+            <a:schemeClr val="accent1"/>
+          </a:effectRef>
+          <a:fontRef idx="minor">
+            <a:schemeClr val="lt1"/>
+          </a:fontRef>
+        </p:style>
+        <p:txBody>
+          <a:bodyPr rtlCol="0" anchor="ctr"/>
+          <a:lstStyle/>
+          <a:p>
+            <a:pPr algn="ctr"/>
+            <a:endParaRPr/>
+          </a:p>
+        </p:txBody>
+      </p:sp>
+      <p:sp>
+        <p:nvSpPr>
+          <p:cNvPr id="6" name="TextBox 5"/>
+          <p:cNvSpPr txBox="1"/>
+          <p:nvPr/>
+        </p:nvSpPr>
+        <p:spPr>
+          <a:xfrm>
+            <a:off x="11201400" y="6473952"/>
+            <a:ext cx="365760" cy="182880"/>
+          </a:xfrm>
+          <a:prstGeom prst="rect">
+            <a:avLst/>
+          </a:prstGeom>
+          <a:noFill/>
+        </p:spPr>
+        <p:txBody>
+          <a:bodyPr wrap="square" lIns="18288" tIns="18288" rIns="18288" bIns="18288" anchor="t">
+            <a:spAutoFit/>
+          </a:bodyPr>
+          <a:lstStyle/>
+          <a:p>
+            <a:pPr algn="r"/>
+            <a:r>
+              <a:rPr sz="900" b="1" i="0">
+                <a:solidFill>
+                  <a:srgbClr val="A0AEC6"/>
+                </a:solidFill>
+                <a:latin typeface="Aptos"/>
+              </a:rPr>
+              <a:t>12</a:t>
+            </a:r>
+          </a:p>
+        </p:txBody>
+      </p:sp>
+      <p:sp>
+        <p:nvSpPr>
+          <p:cNvPr id="7" name="TextBox 6"/>
+          <p:cNvSpPr txBox="1"/>
+          <p:nvPr/>
+        </p:nvSpPr>
+        <p:spPr>
+          <a:xfrm>
+            <a:off x="621792" y="6473952"/>
+            <a:ext cx="5486400" cy="182880"/>
+          </a:xfrm>
+          <a:prstGeom prst="rect">
+            <a:avLst/>
+          </a:prstGeom>
+          <a:noFill/>
+        </p:spPr>
+        <p:txBody>
+          <a:bodyPr wrap="square" lIns="18288" tIns="18288" rIns="18288" bIns="18288" anchor="t">
+            <a:spAutoFit/>
+          </a:bodyPr>
+          <a:lstStyle/>
+          <a:p>
+            <a:pPr algn="l"/>
+            <a:r>
+              <a:rPr sz="800" b="1" i="0">
+                <a:solidFill>
+                  <a:srgbClr val="A0AEC6"/>
+                </a:solidFill>
+                <a:latin typeface="Aptos"/>
+              </a:rPr>
+              <a:t>HW INTEL  •  CPU-Z MODERNIZATION</a:t>
+            </a:r>
+          </a:p>
+        </p:txBody>
+      </p:sp>
+      <p:sp>
+        <p:nvSpPr>
+          <p:cNvPr id="8" name="Rounded Rectangle 7"/>
+          <p:cNvSpPr/>
+          <p:nvPr/>
+        </p:nvSpPr>
+        <p:spPr>
+          <a:xfrm>
+            <a:off x="731520" y="2057400"/>
+            <a:ext cx="3429000" cy="1417320"/>
+          </a:xfrm>
+          <a:prstGeom prst="roundRect">
+            <a:avLst>
+              <a:gd name="adj" fmla="val 12000"/>
+            </a:avLst>
+          </a:prstGeom>
+          <a:solidFill>
+            <a:srgbClr val="141C2F"/>
+          </a:solidFill>
+          <a:ln>
+            <a:solidFill>
+              <a:srgbClr val="313F59"/>
+            </a:solidFill>
+          </a:ln>
+        </p:spPr>
+        <p:style>
+          <a:lnRef idx="1">
+            <a:schemeClr val="accent1"/>
+          </a:lnRef>
+          <a:fillRef idx="3">
+            <a:schemeClr val="accent1"/>
+          </a:fillRef>
+          <a:effectRef idx="2">
+            <a:schemeClr val="accent1"/>
+          </a:effectRef>
+          <a:fontRef idx="minor">
+            <a:schemeClr val="lt1"/>
+          </a:fontRef>
+        </p:style>
+        <p:txBody>
+          <a:bodyPr rtlCol="0" anchor="ctr"/>
+          <a:lstStyle/>
+          <a:p>
+            <a:pPr algn="ctr"/>
+            <a:endParaRPr/>
+          </a:p>
+        </p:txBody>
+      </p:sp>
+      <p:sp>
+        <p:nvSpPr>
+          <p:cNvPr id="9" name="Rectangle 8"/>
+          <p:cNvSpPr/>
+          <p:nvPr/>
+        </p:nvSpPr>
+        <p:spPr>
+          <a:xfrm>
+            <a:off x="896112" y="2258568"/>
+            <a:ext cx="41148" cy="1014984"/>
+          </a:xfrm>
+          <a:prstGeom prst="rect">
+            <a:avLst/>
+          </a:prstGeom>
+          <a:solidFill>
+            <a:srgbClr val="3FDAE8"/>
+          </a:solidFill>
+          <a:ln>
+            <a:solidFill>
+              <a:srgbClr val="3FDAE8"/>
+            </a:solidFill>
+          </a:ln>
+        </p:spPr>
+        <p:style>
+          <a:lnRef idx="1">
+            <a:schemeClr val="accent1"/>
+          </a:lnRef>
+          <a:fillRef idx="3">
+            <a:schemeClr val="accent1"/>
+          </a:fillRef>
+          <a:effectRef idx="2">
+            <a:schemeClr val="accent1"/>
+          </a:effectRef>
+          <a:fontRef idx="minor">
+            <a:schemeClr val="lt1"/>
+          </a:fontRef>
+        </p:style>
+        <p:txBody>
+          <a:bodyPr rtlCol="0" anchor="ctr"/>
+          <a:lstStyle/>
+          <a:p>
+            <a:pPr algn="ctr"/>
+            <a:endParaRPr/>
+          </a:p>
+        </p:txBody>
+      </p:sp>
+      <p:sp>
+        <p:nvSpPr>
+          <p:cNvPr id="10" name="TextBox 9"/>
+          <p:cNvSpPr txBox="1"/>
+          <p:nvPr/>
+        </p:nvSpPr>
+        <p:spPr>
+          <a:xfrm>
+            <a:off x="1078992" y="2258568"/>
+            <a:ext cx="2880360" cy="320040"/>
+          </a:xfrm>
+          <a:prstGeom prst="rect">
+            <a:avLst/>
+          </a:prstGeom>
+          <a:noFill/>
+        </p:spPr>
+        <p:txBody>
+          <a:bodyPr wrap="square" lIns="18288" tIns="18288" rIns="18288" bIns="18288" anchor="t">
+            <a:spAutoFit/>
+          </a:bodyPr>
+          <a:lstStyle/>
+          <a:p>
+            <a:pPr algn="l"/>
+            <a:r>
+              <a:rPr sz="1600" b="1" i="0">
+                <a:solidFill>
+                  <a:srgbClr val="F2F6FF"/>
+                </a:solidFill>
+                <a:latin typeface="Aptos"/>
+              </a:rPr>
+              <a:t>Evidence-first</a:t>
+            </a:r>
+          </a:p>
+        </p:txBody>
+      </p:sp>
+      <p:sp>
+        <p:nvSpPr>
+          <p:cNvPr id="11" name="TextBox 10"/>
+          <p:cNvSpPr txBox="1"/>
+          <p:nvPr/>
+        </p:nvSpPr>
+        <p:spPr>
+          <a:xfrm>
+            <a:off x="1078992" y="2697480"/>
+            <a:ext cx="2862072" cy="640080"/>
+          </a:xfrm>
+          <a:prstGeom prst="rect">
+            <a:avLst/>
+          </a:prstGeom>
+          <a:noFill/>
+        </p:spPr>
+        <p:txBody>
+          <a:bodyPr wrap="square" lIns="18288" tIns="18288" rIns="18288" bIns="18288" anchor="t">
+            <a:spAutoFit/>
+          </a:bodyPr>
+          <a:lstStyle/>
+          <a:p>
+            <a:pPr algn="l"/>
+            <a:r>
+              <a:rPr sz="1300" b="0" i="0">
+                <a:solidFill>
+                  <a:srgbClr val="A0AEC6"/>
+                </a:solidFill>
+                <a:latin typeface="Aptos"/>
+              </a:rPr>
+              <a:t>Trace fields through REA/Ghidra and record the supporting evidence.</a:t>
+            </a:r>
+          </a:p>
+        </p:txBody>
+      </p:sp>
+      <p:sp>
+        <p:nvSpPr>
+          <p:cNvPr id="12" name="Rounded Rectangle 11"/>
+          <p:cNvSpPr/>
+          <p:nvPr/>
+        </p:nvSpPr>
+        <p:spPr>
+          <a:xfrm>
+            <a:off x="4389120" y="2057400"/>
+            <a:ext cx="3429000" cy="1417320"/>
+          </a:xfrm>
+          <a:prstGeom prst="roundRect">
+            <a:avLst>
+              <a:gd name="adj" fmla="val 12000"/>
+            </a:avLst>
+          </a:prstGeom>
+          <a:solidFill>
+            <a:srgbClr val="141C2F"/>
+          </a:solidFill>
+          <a:ln>
+            <a:solidFill>
+              <a:srgbClr val="313F59"/>
+            </a:solidFill>
+          </a:ln>
+        </p:spPr>
+        <p:style>
+          <a:lnRef idx="1">
+            <a:schemeClr val="accent1"/>
+          </a:lnRef>
+          <a:fillRef idx="3">
+            <a:schemeClr val="accent1"/>
+          </a:fillRef>
+          <a:effectRef idx="2">
+            <a:schemeClr val="accent1"/>
+          </a:effectRef>
+          <a:fontRef idx="minor">
+            <a:schemeClr val="lt1"/>
+          </a:fontRef>
+        </p:style>
+        <p:txBody>
+          <a:bodyPr rtlCol="0" anchor="ctr"/>
+          <a:lstStyle/>
+          <a:p>
+            <a:pPr algn="ctr"/>
+            <a:endParaRPr/>
+          </a:p>
+        </p:txBody>
+      </p:sp>
+      <p:sp>
+        <p:nvSpPr>
+          <p:cNvPr id="13" name="Rectangle 12"/>
+          <p:cNvSpPr/>
+          <p:nvPr/>
+        </p:nvSpPr>
+        <p:spPr>
+          <a:xfrm>
+            <a:off x="4553712" y="2258568"/>
+            <a:ext cx="41148" cy="1014984"/>
+          </a:xfrm>
+          <a:prstGeom prst="rect">
+            <a:avLst/>
+          </a:prstGeom>
+          <a:solidFill>
+            <a:srgbClr val="FFBF5C"/>
+          </a:solidFill>
+          <a:ln>
+            <a:solidFill>
+              <a:srgbClr val="FFBF5C"/>
+            </a:solidFill>
+          </a:ln>
+        </p:spPr>
+        <p:style>
+          <a:lnRef idx="1">
+            <a:schemeClr val="accent1"/>
+          </a:lnRef>
+          <a:fillRef idx="3">
+            <a:schemeClr val="accent1"/>
+          </a:fillRef>
+          <a:effectRef idx="2">
+            <a:schemeClr val="accent1"/>
+          </a:effectRef>
+          <a:fontRef idx="minor">
+            <a:schemeClr val="lt1"/>
+          </a:fontRef>
+        </p:style>
+        <p:txBody>
+          <a:bodyPr rtlCol="0" anchor="ctr"/>
+          <a:lstStyle/>
+          <a:p>
+            <a:pPr algn="ctr"/>
+            <a:endParaRPr/>
+          </a:p>
+        </p:txBody>
+      </p:sp>
+      <p:sp>
+        <p:nvSpPr>
+          <p:cNvPr id="14" name="TextBox 13"/>
+          <p:cNvSpPr txBox="1"/>
+          <p:nvPr/>
+        </p:nvSpPr>
+        <p:spPr>
+          <a:xfrm>
+            <a:off x="4736592" y="2258568"/>
+            <a:ext cx="2880360" cy="320040"/>
+          </a:xfrm>
+          <a:prstGeom prst="rect">
+            <a:avLst/>
+          </a:prstGeom>
+          <a:noFill/>
+        </p:spPr>
+        <p:txBody>
+          <a:bodyPr wrap="square" lIns="18288" tIns="18288" rIns="18288" bIns="18288" anchor="t">
+            <a:spAutoFit/>
+          </a:bodyPr>
+          <a:lstStyle/>
+          <a:p>
+            <a:pPr algn="l"/>
+            <a:r>
+              <a:rPr sz="1600" b="1" i="0">
+                <a:solidFill>
+                  <a:srgbClr val="F2F6FF"/>
+                </a:solidFill>
+                <a:latin typeface="Aptos"/>
+              </a:rPr>
+              <a:t>No guessed formulas</a:t>
+            </a:r>
+          </a:p>
+        </p:txBody>
+      </p:sp>
+      <p:sp>
+        <p:nvSpPr>
+          <p:cNvPr id="15" name="TextBox 14"/>
+          <p:cNvSpPr txBox="1"/>
+          <p:nvPr/>
+        </p:nvSpPr>
+        <p:spPr>
+          <a:xfrm>
+            <a:off x="4736592" y="2697480"/>
+            <a:ext cx="2862072" cy="640080"/>
+          </a:xfrm>
+          <a:prstGeom prst="rect">
+            <a:avLst/>
+          </a:prstGeom>
+          <a:noFill/>
+        </p:spPr>
+        <p:txBody>
+          <a:bodyPr wrap="square" lIns="18288" tIns="18288" rIns="18288" bIns="18288" anchor="t">
+            <a:spAutoFit/>
+          </a:bodyPr>
+          <a:lstStyle/>
+          <a:p>
+            <a:pPr algn="l"/>
+            <a:r>
+              <a:rPr sz="1300" b="0" i="0">
+                <a:solidFill>
+                  <a:srgbClr val="A0AEC6"/>
+                </a:solidFill>
+                <a:latin typeface="Aptos"/>
+              </a:rPr>
+              <a:t>Unknown calculation methods stay documented as unknown—not silently approximated.</a:t>
+            </a:r>
+          </a:p>
+        </p:txBody>
+      </p:sp>
+      <p:sp>
+        <p:nvSpPr>
+          <p:cNvPr id="16" name="Rounded Rectangle 15"/>
+          <p:cNvSpPr/>
+          <p:nvPr/>
+        </p:nvSpPr>
+        <p:spPr>
+          <a:xfrm>
+            <a:off x="8046720" y="2057400"/>
+            <a:ext cx="3429000" cy="1417320"/>
+          </a:xfrm>
+          <a:prstGeom prst="roundRect">
+            <a:avLst>
+              <a:gd name="adj" fmla="val 12000"/>
+            </a:avLst>
+          </a:prstGeom>
+          <a:solidFill>
+            <a:srgbClr val="141C2F"/>
+          </a:solidFill>
+          <a:ln>
+            <a:solidFill>
+              <a:srgbClr val="313F59"/>
+            </a:solidFill>
+          </a:ln>
+        </p:spPr>
+        <p:style>
+          <a:lnRef idx="1">
+            <a:schemeClr val="accent1"/>
+          </a:lnRef>
+          <a:fillRef idx="3">
+            <a:schemeClr val="accent1"/>
+          </a:fillRef>
+          <a:effectRef idx="2">
+            <a:schemeClr val="accent1"/>
+          </a:effectRef>
+          <a:fontRef idx="minor">
+            <a:schemeClr val="lt1"/>
+          </a:fontRef>
+        </p:style>
+        <p:txBody>
+          <a:bodyPr rtlCol="0" anchor="ctr"/>
+          <a:lstStyle/>
+          <a:p>
+            <a:pPr algn="ctr"/>
+            <a:endParaRPr/>
+          </a:p>
+        </p:txBody>
+      </p:sp>
+      <p:sp>
+        <p:nvSpPr>
+          <p:cNvPr id="17" name="Rectangle 16"/>
+          <p:cNvSpPr/>
+          <p:nvPr/>
+        </p:nvSpPr>
+        <p:spPr>
+          <a:xfrm>
+            <a:off x="8211312" y="2258568"/>
+            <a:ext cx="41148" cy="1014984"/>
+          </a:xfrm>
+          <a:prstGeom prst="rect">
+            <a:avLst/>
+          </a:prstGeom>
+          <a:solidFill>
+            <a:srgbClr val="4EDDA3"/>
+          </a:solidFill>
+          <a:ln>
+            <a:solidFill>
+              <a:srgbClr val="4EDDA3"/>
+            </a:solidFill>
+          </a:ln>
+        </p:spPr>
+        <p:style>
+          <a:lnRef idx="1">
+            <a:schemeClr val="accent1"/>
+          </a:lnRef>
+          <a:fillRef idx="3">
+            <a:schemeClr val="accent1"/>
+          </a:fillRef>
+          <a:effectRef idx="2">
+            <a:schemeClr val="accent1"/>
+          </a:effectRef>
+          <a:fontRef idx="minor">
+            <a:schemeClr val="lt1"/>
+          </a:fontRef>
+        </p:style>
+        <p:txBody>
+          <a:bodyPr rtlCol="0" anchor="ctr"/>
+          <a:lstStyle/>
+          <a:p>
+            <a:pPr algn="ctr"/>
+            <a:endParaRPr/>
+          </a:p>
+        </p:txBody>
+      </p:sp>
+      <p:sp>
+        <p:nvSpPr>
+          <p:cNvPr id="18" name="TextBox 17"/>
+          <p:cNvSpPr txBox="1"/>
+          <p:nvPr/>
+        </p:nvSpPr>
+        <p:spPr>
+          <a:xfrm>
+            <a:off x="8394192" y="2258568"/>
+            <a:ext cx="2880360" cy="320040"/>
+          </a:xfrm>
+          <a:prstGeom prst="rect">
+            <a:avLst/>
+          </a:prstGeom>
+          <a:noFill/>
+        </p:spPr>
+        <p:txBody>
+          <a:bodyPr wrap="square" lIns="18288" tIns="18288" rIns="18288" bIns="18288" anchor="t">
+            <a:spAutoFit/>
+          </a:bodyPr>
+          <a:lstStyle/>
+          <a:p>
+            <a:pPr algn="l"/>
+            <a:r>
+              <a:rPr sz="1600" b="1" i="0">
+                <a:solidFill>
+                  <a:srgbClr val="F2F6FF"/>
+                </a:solidFill>
+                <a:latin typeface="Aptos"/>
+              </a:rPr>
+              <a:t>Validation</a:t>
+            </a:r>
+          </a:p>
+        </p:txBody>
+      </p:sp>
+      <p:sp>
+        <p:nvSpPr>
+          <p:cNvPr id="19" name="TextBox 18"/>
+          <p:cNvSpPr txBox="1"/>
+          <p:nvPr/>
+        </p:nvSpPr>
+        <p:spPr>
+          <a:xfrm>
+            <a:off x="8394192" y="2697480"/>
+            <a:ext cx="2862072" cy="640080"/>
+          </a:xfrm>
+          <a:prstGeom prst="rect">
+            <a:avLst/>
+          </a:prstGeom>
+          <a:noFill/>
+        </p:spPr>
+        <p:txBody>
+          <a:bodyPr wrap="square" lIns="18288" tIns="18288" rIns="18288" bIns="18288" anchor="t">
+            <a:spAutoFit/>
+          </a:bodyPr>
+          <a:lstStyle/>
+          <a:p>
+            <a:pPr algn="l"/>
+            <a:r>
+              <a:rPr sz="1300" b="0" i="0">
+                <a:solidFill>
+                  <a:srgbClr val="A0AEC6"/>
+                </a:solidFill>
+                <a:latin typeface="Aptos"/>
+              </a:rPr>
+              <a:t>Compare outputs with CPU-Z on the same machine where practical.</a:t>
+            </a:r>
+          </a:p>
+        </p:txBody>
+      </p:sp>
+      <p:sp>
+        <p:nvSpPr>
+          <p:cNvPr id="20" name="TextBox 19"/>
+          <p:cNvSpPr txBox="1"/>
+          <p:nvPr/>
+        </p:nvSpPr>
+        <p:spPr>
+          <a:xfrm>
+            <a:off x="777240" y="4160520"/>
+            <a:ext cx="2286000" cy="274320"/>
+          </a:xfrm>
+          <a:prstGeom prst="rect">
+            <a:avLst/>
+          </a:prstGeom>
+          <a:noFill/>
+        </p:spPr>
+        <p:txBody>
+          <a:bodyPr wrap="square" lIns="18288" tIns="18288" rIns="18288" bIns="18288" anchor="t">
+            <a:spAutoFit/>
+          </a:bodyPr>
+          <a:lstStyle/>
+          <a:p>
+            <a:pPr algn="l"/>
+            <a:r>
+              <a:rPr sz="1400" b="1" i="0">
+                <a:solidFill>
+                  <a:srgbClr val="3FDAE8"/>
+                </a:solidFill>
+                <a:latin typeface="Aptos"/>
+              </a:rPr>
+              <a:t>Definition of done</a:t>
+            </a:r>
+          </a:p>
+        </p:txBody>
+      </p:sp>
+      <p:sp>
+        <p:nvSpPr>
+          <p:cNvPr id="21" name="TextBox 20"/>
+          <p:cNvSpPr txBox="1"/>
+          <p:nvPr/>
+        </p:nvSpPr>
+        <p:spPr>
+          <a:xfrm>
+            <a:off x="868680" y="4526280"/>
+            <a:ext cx="10241280" cy="1508760"/>
+          </a:xfrm>
+          <a:prstGeom prst="rect">
+            <a:avLst/>
+          </a:prstGeom>
+          <a:noFill/>
+        </p:spPr>
+        <p:txBody>
+          <a:bodyPr wrap="square" lIns="27432" tIns="27432" rIns="27432" bIns="18288">
+            <a:spAutoFit/>
+          </a:bodyPr>
+          <a:lstStyle/>
+          <a:p>
+            <a:pPr>
+              <a:spcAft>
+                <a:spcPts val="500"/>
+              </a:spcAft>
+              <a:defRPr sz="1300">
+                <a:solidFill>
+                  <a:srgbClr val="F2F6FF"/>
+                </a:solidFill>
+                <a:latin typeface="Aptos"/>
+              </a:defRPr>
+            </a:pPr>
+            <a:r>
+              <a:t>Application launches reliably and core sections work.</a:t>
+            </a:r>
+          </a:p>
+          <a:p>
+            <a:pPr>
+              <a:spcAft>
+                <a:spcPts val="500"/>
+              </a:spcAft>
+              <a:defRPr sz="1300">
+                <a:solidFill>
+                  <a:srgbClr val="F2F6FF"/>
+                </a:solidFill>
+                <a:latin typeface="Aptos"/>
+              </a:defRPr>
+            </a:pPr>
+            <a:r>
+              <a:t>Implemented fields use real providers and explicit units/status.</a:t>
+            </a:r>
+          </a:p>
+          <a:p>
+            <a:pPr>
+              <a:spcAft>
+                <a:spcPts val="500"/>
+              </a:spcAft>
+              <a:defRPr sz="1300">
+                <a:solidFill>
+                  <a:srgbClr val="F2F6FF"/>
+                </a:solidFill>
+                <a:latin typeface="Aptos"/>
+              </a:defRPr>
+            </a:pPr>
+            <a:r>
+              <a:t>Automated tests pass or remaining failures are documented.</a:t>
+            </a:r>
+          </a:p>
+          <a:p>
+            <a:pPr>
+              <a:spcAft>
+                <a:spcPts val="500"/>
+              </a:spcAft>
+              <a:defRPr sz="1300">
+                <a:solidFill>
+                  <a:srgbClr val="F2F6FF"/>
+                </a:solidFill>
+                <a:latin typeface="Aptos"/>
+              </a:defRPr>
+            </a:pPr>
+            <a:r>
+              <a:t>Coverage matrix distinguishes verified, partial, unsupported, and unknown fields.</a:t>
+            </a:r>
+          </a:p>
+          <a:p>
+            <a:pPr>
+              <a:spcAft>
+                <a:spcPts val="500"/>
+              </a:spcAft>
+              <a:defRPr sz="1300">
+                <a:solidFill>
+                  <a:srgbClr val="F2F6FF"/>
+                </a:solidFill>
+                <a:latin typeface="Aptos"/>
+              </a:defRPr>
+            </a:pPr>
+            <a:r>
+              <a:t>Original CPU-Z executable remains unchanged.</a:t>
+            </a:r>
+          </a:p>
+        </p:txBody>
+      </p:sp>
+    </p:spTree>
+  </p:cSld>
+  <p:clrMapOvr>
+    <a:masterClrMapping/>
+  </p:clrMapOvr>
+</p:sld>
+</file>
+
+<file path=ppt/slides/slide14.xml><?xml version="1.0" encoding="utf-8"?>
+<p:sld xmlns:a="http://schemas.openxmlformats.org/drawingml/2006/main" xmlns:r="http://schemas.openxmlformats.org/officeDocument/2006/relationships" xmlns:p="http://schemas.openxmlformats.org/presentationml/2006/main">
+  <p:cSld>
+    <p:bg>
+      <p:bgPr>
+        <a:solidFill>
+          <a:srgbClr val="0B101E"/>
+        </a:solidFill>
+        <a:effectLst/>
+      </p:bgPr>
+    </p:bg>
+    <p:spTree>
+      <p:nvGrpSpPr>
+        <p:cNvPr id="1" name=""/>
+        <p:cNvGrpSpPr/>
+        <p:nvPr/>
+      </p:nvGrpSpPr>
+      <p:grpSpPr>
+        <a:xfrm>
+          <a:off x="0" y="0"/>
+          <a:ext cx="0" cy="0"/>
+          <a:chOff x="0" y="0"/>
+          <a:chExt cx="0" cy="0"/>
+        </a:xfrm>
+      </p:grpSpPr>
+      <p:sp>
+        <p:nvSpPr>
+          <p:cNvPr id="2" name="TextBox 1"/>
+          <p:cNvSpPr txBox="1"/>
+          <p:nvPr/>
+        </p:nvSpPr>
+        <p:spPr>
+          <a:xfrm>
             <a:off x="777240" y="731520"/>
             <a:ext cx="2743200" cy="274320"/>
           </a:xfrm>
@@ -7626,7 +8815,7 @@
                 </a:solidFill>
                 <a:latin typeface="Aptos"/>
               </a:rPr>
-              <a:t>An agent-oriented toolkit for investigating software behaviour through structured reverse-engineering tools.</a:t>
+              <a:t>An MCP server and CLI that gives AI coding agents structured tools to inspect software without its original source.</a:t>
             </a:r>
           </a:p>
         </p:txBody>
@@ -7756,7 +8945,7 @@
         <p:spPr>
           <a:xfrm>
             <a:off x="731520" y="2057400"/>
-            <a:ext cx="3429000" cy="1417320"/>
+            <a:ext cx="3429000" cy="1897380"/>
           </a:xfrm>
           <a:prstGeom prst="roundRect">
             <a:avLst>
@@ -7900,13 +9089,13 @@
           <a:p>
             <a:pPr algn="l"/>
             <a:r>
-              <a:rPr sz="1300" b="0" i="0">
+              <a:rPr sz="1300" b="0" i="0" dirty="0">
                 <a:solidFill>
                   <a:srgbClr val="A0AEC6"/>
                 </a:solidFill>
                 <a:latin typeface="Aptos"/>
               </a:rPr>
-              <a:t>Connects an AI coding agent to reverse-engineering capabilities through tools and MCP.</a:t>
+              <a:t>Exposes reverse-engineering workflows through MCP so agents can investigate binaries, .NET assemblies, web apps, and APKs using the appropriate analysis tools.</a:t>
             </a:r>
           </a:p>
         </p:txBody>
@@ -7919,8 +9108,8 @@
         </p:nvSpPr>
         <p:spPr>
           <a:xfrm>
-            <a:off x="4389120" y="2057400"/>
-            <a:ext cx="3429000" cy="1417320"/>
+            <a:off x="4389120" y="2057399"/>
+            <a:ext cx="3429000" cy="1897379"/>
           </a:xfrm>
           <a:prstGeom prst="roundRect">
             <a:avLst>
@@ -8070,7 +9259,7 @@
                 </a:solidFill>
                 <a:latin typeface="Aptos"/>
               </a:rPr>
-              <a:t>Lets the agent investigate functions, references, and program behaviour instead of guessing from the UI.</a:t>
+              <a:t>Agents can query functions, strings, cross-references, and program behaviour—then use the evidence instead of guessing from the UI.</a:t>
             </a:r>
           </a:p>
         </p:txBody>
@@ -8084,7 +9273,7 @@
         <p:spPr>
           <a:xfrm>
             <a:off x="8046720" y="2057400"/>
-            <a:ext cx="3429000" cy="1417320"/>
+            <a:ext cx="3429000" cy="1897378"/>
           </a:xfrm>
           <a:prstGeom prst="roundRect">
             <a:avLst>
@@ -8234,7 +9423,7 @@
                 </a:solidFill>
                 <a:latin typeface="Aptos"/>
               </a:rPr>
-              <a:t>Use REA findings to guide the modernization; preserve evidence and uncertainty in research files.</a:t>
+              <a:t>Routes work to suitable engines (such as Ghidra, ILSpy, Chrome DevTools, or APKTool), manages analysis sessions, and helps keep results usable for the agent.</a:t>
             </a:r>
           </a:p>
         </p:txBody>
@@ -8304,7 +9493,7 @@
                 </a:solidFill>
                 <a:latin typeface="Aptos"/>
               </a:rPr>
-              <a:t>REA accelerates investigation. Its output still needs verification in Ghidra and validation against real behaviour.</a:t>
+              <a:t>REA orchestrates the investigation and applies an evidence-first workflow. Verify findings against raw tool output and observed behaviour.</a:t>
             </a:r>
           </a:p>
         </p:txBody>
@@ -8407,7 +9596,7 @@
                 </a:solidFill>
                 <a:latin typeface="Aptos"/>
               </a:rPr>
-              <a:t>Ghidra: inspect the program, not just its outputs</a:t>
+              <a:t>Ghidra: the native-binary analysis engine</a:t>
             </a:r>
           </a:p>
         </p:txBody>
@@ -8442,7 +9631,7 @@
                 </a:solidFill>
                 <a:latin typeface="Aptos"/>
               </a:rPr>
-              <a:t>A reverse-engineering framework for disassembly, decompilation, cross-references, and program structure.</a:t>
+              <a:t>An open-source software reverse-engineering framework for disassembly, decompilation, control-flow analysis, symbols, and cross-references.</a:t>
             </a:r>
           </a:p>
         </p:txBody>
@@ -8571,7 +9760,7 @@
         </p:nvSpPr>
         <p:spPr>
           <a:xfrm>
-            <a:off x="777240" y="2286000"/>
+            <a:off x="777240" y="2987337"/>
             <a:ext cx="2468880" cy="1828800"/>
           </a:xfrm>
           <a:prstGeom prst="roundRect">
@@ -8619,7 +9808,7 @@
         </p:nvSpPr>
         <p:spPr>
           <a:xfrm>
-            <a:off x="960120" y="2487168"/>
+            <a:off x="960120" y="3188505"/>
             <a:ext cx="502920" cy="320040"/>
           </a:xfrm>
           <a:prstGeom prst="rect">
@@ -8654,7 +9843,7 @@
         </p:nvSpPr>
         <p:spPr>
           <a:xfrm>
-            <a:off x="960120" y="2971800"/>
+            <a:off x="960120" y="3673137"/>
             <a:ext cx="2057400" cy="274320"/>
           </a:xfrm>
           <a:prstGeom prst="rect">
@@ -8689,7 +9878,7 @@
         </p:nvSpPr>
         <p:spPr>
           <a:xfrm>
-            <a:off x="960120" y="3383280"/>
+            <a:off x="960120" y="4084617"/>
             <a:ext cx="2057400" cy="566928"/>
           </a:xfrm>
           <a:prstGeom prst="rect">
@@ -8711,7 +9900,7 @@
                 </a:solidFill>
                 <a:latin typeface="Aptos"/>
               </a:rPr>
-              <a:t>Import the executable and analyse its architecture.</a:t>
+              <a:t>Import the native executable and analyse its architecture and structure.</a:t>
             </a:r>
           </a:p>
         </p:txBody>
@@ -8724,7 +9913,7 @@
         </p:nvSpPr>
         <p:spPr>
           <a:xfrm>
-            <a:off x="3300984" y="2971800"/>
+            <a:off x="3300984" y="3673137"/>
             <a:ext cx="274320" cy="365760"/>
           </a:xfrm>
           <a:prstGeom prst="rect">
@@ -8759,7 +9948,7 @@
         </p:nvSpPr>
         <p:spPr>
           <a:xfrm>
-            <a:off x="3611880" y="2286000"/>
+            <a:off x="3611880" y="2987337"/>
             <a:ext cx="2468880" cy="1828800"/>
           </a:xfrm>
           <a:prstGeom prst="roundRect">
@@ -8807,7 +9996,7 @@
         </p:nvSpPr>
         <p:spPr>
           <a:xfrm>
-            <a:off x="3794760" y="2487168"/>
+            <a:off x="3794760" y="3188505"/>
             <a:ext cx="502920" cy="320040"/>
           </a:xfrm>
           <a:prstGeom prst="rect">
@@ -8842,7 +10031,7 @@
         </p:nvSpPr>
         <p:spPr>
           <a:xfrm>
-            <a:off x="3794760" y="2971800"/>
+            <a:off x="3794760" y="3673137"/>
             <a:ext cx="2057400" cy="274320"/>
           </a:xfrm>
           <a:prstGeom prst="rect">
@@ -8877,7 +10066,7 @@
         </p:nvSpPr>
         <p:spPr>
           <a:xfrm>
-            <a:off x="3794760" y="3383280"/>
+            <a:off x="3794760" y="4084617"/>
             <a:ext cx="2057400" cy="566928"/>
           </a:xfrm>
           <a:prstGeom prst="rect">
@@ -8899,7 +10088,7 @@
                 </a:solidFill>
                 <a:latin typeface="Aptos"/>
               </a:rPr>
-              <a:t>Find functions, strings, references, and relevant call paths.</a:t>
+              <a:t>Locate functions, strings, imports, memory references, and entry points.</a:t>
             </a:r>
           </a:p>
         </p:txBody>
@@ -8912,7 +10101,7 @@
         </p:nvSpPr>
         <p:spPr>
           <a:xfrm>
-            <a:off x="6135624" y="2971800"/>
+            <a:off x="6135624" y="3673137"/>
             <a:ext cx="274320" cy="365760"/>
           </a:xfrm>
           <a:prstGeom prst="rect">
@@ -8947,7 +10136,7 @@
         </p:nvSpPr>
         <p:spPr>
           <a:xfrm>
-            <a:off x="6446520" y="2286000"/>
+            <a:off x="6446520" y="2987337"/>
             <a:ext cx="2468880" cy="1828800"/>
           </a:xfrm>
           <a:prstGeom prst="roundRect">
@@ -8995,7 +10184,7 @@
         </p:nvSpPr>
         <p:spPr>
           <a:xfrm>
-            <a:off x="6629400" y="2487168"/>
+            <a:off x="6629400" y="3188505"/>
             <a:ext cx="502920" cy="320040"/>
           </a:xfrm>
           <a:prstGeom prst="rect">
@@ -9030,7 +10219,7 @@
         </p:nvSpPr>
         <p:spPr>
           <a:xfrm>
-            <a:off x="6629400" y="2971800"/>
+            <a:off x="6629400" y="3673137"/>
             <a:ext cx="2057400" cy="274320"/>
           </a:xfrm>
           <a:prstGeom prst="rect">
@@ -9065,7 +10254,7 @@
         </p:nvSpPr>
         <p:spPr>
           <a:xfrm>
-            <a:off x="6629400" y="3383280"/>
+            <a:off x="6629400" y="4084617"/>
             <a:ext cx="2057400" cy="566928"/>
           </a:xfrm>
           <a:prstGeom prst="rect">
@@ -9087,7 +10276,7 @@
                 </a:solidFill>
                 <a:latin typeface="Aptos"/>
               </a:rPr>
-              <a:t>Follow inputs, transformations, constants, and output fields.</a:t>
+              <a:t>Decompile relevant functions; follow control flow, inputs, constants, and output fields.</a:t>
             </a:r>
           </a:p>
         </p:txBody>
@@ -9100,7 +10289,7 @@
         </p:nvSpPr>
         <p:spPr>
           <a:xfrm>
-            <a:off x="8970263" y="2971800"/>
+            <a:off x="8970263" y="3673137"/>
             <a:ext cx="274320" cy="365760"/>
           </a:xfrm>
           <a:prstGeom prst="rect">
@@ -9135,7 +10324,7 @@
         </p:nvSpPr>
         <p:spPr>
           <a:xfrm>
-            <a:off x="9281160" y="2286000"/>
+            <a:off x="9281160" y="2987337"/>
             <a:ext cx="2468880" cy="1828800"/>
           </a:xfrm>
           <a:prstGeom prst="roundRect">
@@ -9183,7 +10372,7 @@
         </p:nvSpPr>
         <p:spPr>
           <a:xfrm>
-            <a:off x="9464040" y="2487168"/>
+            <a:off x="9464040" y="3188505"/>
             <a:ext cx="502920" cy="320040"/>
           </a:xfrm>
           <a:prstGeom prst="rect">
@@ -9218,7 +10407,7 @@
         </p:nvSpPr>
         <p:spPr>
           <a:xfrm>
-            <a:off x="9464040" y="2971800"/>
+            <a:off x="9464040" y="3673137"/>
             <a:ext cx="2057400" cy="274320"/>
           </a:xfrm>
           <a:prstGeom prst="rect">
@@ -9253,7 +10442,7 @@
         </p:nvSpPr>
         <p:spPr>
           <a:xfrm>
-            <a:off x="9464040" y="3383280"/>
+            <a:off x="9464040" y="4084617"/>
             <a:ext cx="2057400" cy="566928"/>
           </a:xfrm>
           <a:prstGeom prst="rect">
@@ -9275,90 +10464,7 @@
                 </a:solidFill>
                 <a:latin typeface="Aptos"/>
               </a:rPr>
-              <a:t>Compare evidence with observed behaviour and record confidence.</a:t>
-            </a:r>
-          </a:p>
-        </p:txBody>
-      </p:sp>
-      <p:sp>
-        <p:nvSpPr>
-          <p:cNvPr id="27" name="Rounded Rectangle 26"/>
-          <p:cNvSpPr/>
-          <p:nvPr/>
-        </p:nvSpPr>
-        <p:spPr>
-          <a:xfrm>
-            <a:off x="777240" y="4709160"/>
-            <a:ext cx="10698480" cy="713232"/>
-          </a:xfrm>
-          <a:prstGeom prst="roundRect">
-            <a:avLst>
-              <a:gd name="adj" fmla="val 12000"/>
-            </a:avLst>
-          </a:prstGeom>
-          <a:solidFill>
-            <a:srgbClr val="1E2034"/>
-          </a:solidFill>
-          <a:ln>
-            <a:solidFill>
-              <a:srgbClr val="313F59"/>
-            </a:solidFill>
-          </a:ln>
-        </p:spPr>
-        <p:style>
-          <a:lnRef idx="1">
-            <a:schemeClr val="accent1"/>
-          </a:lnRef>
-          <a:fillRef idx="3">
-            <a:schemeClr val="accent1"/>
-          </a:fillRef>
-          <a:effectRef idx="2">
-            <a:schemeClr val="accent1"/>
-          </a:effectRef>
-          <a:fontRef idx="minor">
-            <a:schemeClr val="lt1"/>
-          </a:fontRef>
-        </p:style>
-        <p:txBody>
-          <a:bodyPr rtlCol="0" anchor="ctr"/>
-          <a:lstStyle/>
-          <a:p>
-            <a:pPr algn="ctr"/>
-            <a:endParaRPr/>
-          </a:p>
-        </p:txBody>
-      </p:sp>
-      <p:sp>
-        <p:nvSpPr>
-          <p:cNvPr id="28" name="TextBox 27"/>
-          <p:cNvSpPr txBox="1"/>
-          <p:nvPr/>
-        </p:nvSpPr>
-        <p:spPr>
-          <a:xfrm>
-            <a:off x="1005840" y="4928616"/>
-            <a:ext cx="10241280" cy="228600"/>
-          </a:xfrm>
-          <a:prstGeom prst="rect">
-            <a:avLst/>
-          </a:prstGeom>
-          <a:noFill/>
-        </p:spPr>
-        <p:txBody>
-          <a:bodyPr wrap="square" lIns="18288" tIns="18288" rIns="18288" bIns="18288" anchor="t">
-            <a:spAutoFit/>
-          </a:bodyPr>
-          <a:lstStyle/>
-          <a:p>
-            <a:pPr algn="l"/>
-            <a:r>
-              <a:rPr sz="1400" b="1" i="0">
-                <a:solidFill>
-                  <a:srgbClr val="FFBF5C"/>
-                </a:solidFill>
-                <a:latin typeface="Aptos"/>
-              </a:rPr>
-              <a:t>Do not infer a formula from a plausible result. Trace the implementation or mark the field unknown.</a:t>
+              <a:t>Check pseudocode and cross-references against observed behaviour; record confidence and gaps.</a:t>
             </a:r>
           </a:p>
         </p:txBody>
@@ -9496,7 +10602,7 @@
                 </a:solidFill>
                 <a:latin typeface="Aptos"/>
               </a:rPr>
-              <a:t>A repeatable evidence-first workflow for understanding and rebuilding selected capabilities.</a:t>
+              <a:t>REA orchestrates the tools; Ghidra analyses native binaries; the agent turns verified evidence into a testable replacement.</a:t>
             </a:r>
           </a:p>
         </p:txBody>
@@ -9765,7 +10871,7 @@
                 </a:solidFill>
                 <a:latin typeface="Aptos"/>
               </a:rPr>
-              <a:t>REA locates relevant behaviour</a:t>
+              <a:t>Agent asks REA for relevant functions, strings, and references</a:t>
             </a:r>
           </a:p>
         </p:txBody>
@@ -9953,7 +11059,7 @@
                 </a:solidFill>
                 <a:latin typeface="Aptos"/>
               </a:rPr>
-              <a:t>Ghidra reveals code paths</a:t>
+              <a:t>Ghidra decompiles native code and exposes control flow and cross-references</a:t>
             </a:r>
           </a:p>
         </p:txBody>
@@ -10141,7 +11247,7 @@
                 </a:solidFill>
                 <a:latin typeface="Aptos"/>
               </a:rPr>
-              <a:t>Evidence ledger captures facts and unknowns</a:t>
+              <a:t>Evidence ledger records code evidence, assumptions, and unknowns</a:t>
             </a:r>
           </a:p>
         </p:txBody>
@@ -10329,7 +11435,7 @@
                 </a:solidFill>
                 <a:latin typeface="Aptos"/>
               </a:rPr>
-              <a:t>Build a clean, separate provider</a:t>
+              <a:t>Build a separate provider and modern UI from verified behaviour</a:t>
             </a:r>
           </a:p>
         </p:txBody>
@@ -10517,7 +11623,7 @@
                 </a:solidFill>
                 <a:latin typeface="Aptos"/>
               </a:rPr>
-              <a:t>Compare outputs and test the UI</a:t>
+              <a:t>Compare with CPU-Z on the same machine; test outputs and UI</a:t>
             </a:r>
           </a:p>
         </p:txBody>
@@ -10587,7 +11693,7 @@
                 </a:solidFill>
                 <a:latin typeface="Aptos"/>
               </a:rPr>
-              <a:t>If a field’s detection method or calculation is unknown, document it in research/data-access-strategy.md. Never invent a formula or claim equivalence without validation.</a:t>
+              <a:t>Evidence gate: capture raw decompilation, strings, xrefs, and relevant call paths. If a field’s detection method or calculation is unknown, document it in research/data-access-strategy.md—never invent a formula or claim equivalence without validation.</a:t>
             </a:r>
           </a:p>
         </p:txBody>
@@ -12212,41 +13318,6 @@
           </a:p>
         </p:txBody>
       </p:sp>
-      <p:sp>
-        <p:nvSpPr>
-          <p:cNvPr id="23" name="TextBox 22"/>
-          <p:cNvSpPr txBox="1"/>
-          <p:nvPr/>
-        </p:nvSpPr>
-        <p:spPr>
-          <a:xfrm>
-            <a:off x="822960" y="5989320"/>
-            <a:ext cx="10515600" cy="292608"/>
-          </a:xfrm>
-          <a:prstGeom prst="rect">
-            <a:avLst/>
-          </a:prstGeom>
-          <a:noFill/>
-        </p:spPr>
-        <p:txBody>
-          <a:bodyPr wrap="square" lIns="18288" tIns="18288" rIns="18288" bIns="18288" anchor="t">
-            <a:spAutoFit/>
-          </a:bodyPr>
-          <a:lstStyle/>
-          <a:p>
-            <a:pPr algn="l"/>
-            <a:r>
-              <a:rPr sz="1300" b="1" i="0">
-                <a:solidFill>
-                  <a:srgbClr val="FFBF5C"/>
-                </a:solidFill>
-                <a:latin typeface="Aptos"/>
-              </a:rPr>
-              <a:t>Non-negotiable: never assume a field formula. Unknown methods must be documented in research/data-access-strategy.md.</a:t>
-            </a:r>
-          </a:p>
-        </p:txBody>
-      </p:sp>
     </p:spTree>
   </p:cSld>
   <p:clrMapOvr>
@@ -13410,48 +14481,13 @@
       </p:sp>
       <p:sp>
         <p:nvSpPr>
-          <p:cNvPr id="4" name="TextBox 3"/>
-          <p:cNvSpPr txBox="1"/>
-          <p:nvPr/>
-        </p:nvSpPr>
-        <p:spPr>
-          <a:xfrm>
-            <a:off x="621792" y="1234440"/>
-            <a:ext cx="10881360" cy="411480"/>
-          </a:xfrm>
-          <a:prstGeom prst="rect">
-            <a:avLst/>
-          </a:prstGeom>
-          <a:noFill/>
-        </p:spPr>
-        <p:txBody>
-          <a:bodyPr wrap="square" lIns="18288" tIns="18288" rIns="18288" bIns="18288" anchor="t">
-            <a:spAutoFit/>
-          </a:bodyPr>
-          <a:lstStyle/>
-          <a:p>
-            <a:pPr algn="l"/>
-            <a:r>
-              <a:rPr sz="1200" b="0" i="0">
-                <a:solidFill>
-                  <a:srgbClr val="A0AEC6"/>
-                </a:solidFill>
-                <a:latin typeface="Aptos"/>
-              </a:rPr>
-              <a:t>The aim is not only a visual reskin: it is a more discoverable, testable, and transparent experience.</a:t>
-            </a:r>
-          </a:p>
-        </p:txBody>
-      </p:sp>
-      <p:sp>
-        <p:nvSpPr>
           <p:cNvPr id="5" name="Rectangle 4"/>
           <p:cNvSpPr/>
           <p:nvPr/>
         </p:nvSpPr>
         <p:spPr>
           <a:xfrm>
-            <a:off x="594360" y="1719072"/>
+            <a:off x="594360" y="1204167"/>
             <a:ext cx="10972800" cy="13716"/>
           </a:xfrm>
           <a:prstGeom prst="rect">
@@ -13559,767 +14595,66 @@
           </a:p>
         </p:txBody>
       </p:sp>
-      <p:sp>
-        <p:nvSpPr>
-          <p:cNvPr id="8" name="Rounded Rectangle 7"/>
-          <p:cNvSpPr/>
-          <p:nvPr/>
-        </p:nvSpPr>
-        <p:spPr>
-          <a:xfrm>
-            <a:off x="731520" y="1993392"/>
-            <a:ext cx="5166360" cy="4114800"/>
-          </a:xfrm>
-          <a:prstGeom prst="roundRect">
-            <a:avLst>
-              <a:gd name="adj" fmla="val 12000"/>
-            </a:avLst>
+      <p:pic>
+        <p:nvPicPr>
+          <p:cNvPr id="30" name="Picture 29">
+            <a:extLst>
+              <a:ext uri="{FF2B5EF4-FFF2-40B4-BE49-F238E27FC236}">
+                <a16:creationId xmlns:a16="http://schemas.microsoft.com/office/drawing/2014/main" id="{D45C8D8D-B14D-8AC2-C6D3-1DF48A509A5C}"/>
+              </a:ext>
+            </a:extLst>
+          </p:cNvPr>
+          <p:cNvPicPr>
+            <a:picLocks noChangeAspect="1"/>
+          </p:cNvPicPr>
+          <p:nvPr/>
+        </p:nvPicPr>
+        <p:blipFill>
+          <a:blip r:embed="rId2"/>
+          <a:stretch>
+            <a:fillRect/>
+          </a:stretch>
+        </p:blipFill>
+        <p:spPr>
+          <a:xfrm>
+            <a:off x="1214233" y="1238160"/>
+            <a:ext cx="9160030" cy="5149777"/>
+          </a:xfrm>
+          <a:prstGeom prst="rect">
+            <a:avLst/>
           </a:prstGeom>
           <a:solidFill>
-            <a:srgbClr val="181E2C"/>
+            <a:srgbClr val="FFFFFF">
+              <a:shade val="85000"/>
+            </a:srgbClr>
           </a:solidFill>
-          <a:ln>
+          <a:ln w="88900" cap="sq">
             <a:solidFill>
-              <a:srgbClr val="313F59"/>
+              <a:srgbClr val="FFFFFF"/>
             </a:solidFill>
+            <a:miter lim="800000"/>
           </a:ln>
-        </p:spPr>
-        <p:style>
-          <a:lnRef idx="1">
-            <a:schemeClr val="accent1"/>
-          </a:lnRef>
-          <a:fillRef idx="3">
-            <a:schemeClr val="accent1"/>
-          </a:fillRef>
-          <a:effectRef idx="2">
-            <a:schemeClr val="accent1"/>
-          </a:effectRef>
-          <a:fontRef idx="minor">
-            <a:schemeClr val="lt1"/>
-          </a:fontRef>
-        </p:style>
-        <p:txBody>
-          <a:bodyPr rtlCol="0" anchor="ctr"/>
-          <a:lstStyle/>
-          <a:p>
-            <a:pPr algn="ctr"/>
-            <a:endParaRPr/>
-          </a:p>
-        </p:txBody>
-      </p:sp>
-      <p:sp>
-        <p:nvSpPr>
-          <p:cNvPr id="9" name="Rounded Rectangle 8"/>
-          <p:cNvSpPr/>
-          <p:nvPr/>
-        </p:nvSpPr>
-        <p:spPr>
-          <a:xfrm>
-            <a:off x="6217920" y="1993392"/>
-            <a:ext cx="5212080" cy="4114800"/>
-          </a:xfrm>
-          <a:prstGeom prst="roundRect">
-            <a:avLst>
-              <a:gd name="adj" fmla="val 12000"/>
-            </a:avLst>
-          </a:prstGeom>
-          <a:solidFill>
-            <a:srgbClr val="101F30"/>
-          </a:solidFill>
-          <a:ln>
-            <a:solidFill>
-              <a:srgbClr val="313F59"/>
-            </a:solidFill>
-          </a:ln>
-        </p:spPr>
-        <p:style>
-          <a:lnRef idx="1">
-            <a:schemeClr val="accent1"/>
-          </a:lnRef>
-          <a:fillRef idx="3">
-            <a:schemeClr val="accent1"/>
-          </a:fillRef>
-          <a:effectRef idx="2">
-            <a:schemeClr val="accent1"/>
-          </a:effectRef>
-          <a:fontRef idx="minor">
-            <a:schemeClr val="lt1"/>
-          </a:fontRef>
-        </p:style>
-        <p:txBody>
-          <a:bodyPr rtlCol="0" anchor="ctr"/>
-          <a:lstStyle/>
-          <a:p>
-            <a:pPr algn="ctr"/>
-            <a:endParaRPr/>
-          </a:p>
-        </p:txBody>
-      </p:sp>
-      <p:sp>
-        <p:nvSpPr>
-          <p:cNvPr id="10" name="TextBox 9"/>
-          <p:cNvSpPr txBox="1"/>
-          <p:nvPr/>
-        </p:nvSpPr>
-        <p:spPr>
-          <a:xfrm>
-            <a:off x="960120" y="2240280"/>
-            <a:ext cx="4389120" cy="274320"/>
-          </a:xfrm>
-          <a:prstGeom prst="rect">
-            <a:avLst/>
-          </a:prstGeom>
-          <a:noFill/>
-        </p:spPr>
-        <p:txBody>
-          <a:bodyPr wrap="square" lIns="18288" tIns="18288" rIns="18288" bIns="18288" anchor="t">
-            <a:spAutoFit/>
-          </a:bodyPr>
-          <a:lstStyle/>
-          <a:p>
-            <a:pPr algn="l"/>
-            <a:r>
-              <a:rPr sz="1600" b="1" i="0">
-                <a:solidFill>
-                  <a:srgbClr val="A0AEC6"/>
-                </a:solidFill>
-                <a:latin typeface="Aptos"/>
-              </a:rPr>
-              <a:t>TRADITIONAL CPU-Z</a:t>
-            </a:r>
-          </a:p>
-        </p:txBody>
-      </p:sp>
-      <p:sp>
-        <p:nvSpPr>
-          <p:cNvPr id="11" name="TextBox 10"/>
-          <p:cNvSpPr txBox="1"/>
-          <p:nvPr/>
-        </p:nvSpPr>
-        <p:spPr>
-          <a:xfrm>
-            <a:off x="6446520" y="2240280"/>
-            <a:ext cx="4389120" cy="274320"/>
-          </a:xfrm>
-          <a:prstGeom prst="rect">
-            <a:avLst/>
-          </a:prstGeom>
-          <a:noFill/>
-        </p:spPr>
-        <p:txBody>
-          <a:bodyPr wrap="square" lIns="18288" tIns="18288" rIns="18288" bIns="18288" anchor="t">
-            <a:spAutoFit/>
-          </a:bodyPr>
-          <a:lstStyle/>
-          <a:p>
-            <a:pPr algn="l"/>
-            <a:r>
-              <a:rPr sz="1600" b="1" i="0">
-                <a:solidFill>
-                  <a:srgbClr val="3FDAE8"/>
-                </a:solidFill>
-                <a:latin typeface="Aptos"/>
-              </a:rPr>
-              <a:t>HW INTEL DASHBOARD</a:t>
-            </a:r>
-          </a:p>
-        </p:txBody>
-      </p:sp>
-      <p:sp>
-        <p:nvSpPr>
-          <p:cNvPr id="12" name="TextBox 11"/>
-          <p:cNvSpPr txBox="1"/>
-          <p:nvPr/>
-        </p:nvSpPr>
-        <p:spPr>
-          <a:xfrm>
-            <a:off x="1005840" y="2724912"/>
-            <a:ext cx="4572000" cy="256032"/>
-          </a:xfrm>
-          <a:prstGeom prst="rect">
-            <a:avLst/>
-          </a:prstGeom>
-          <a:noFill/>
-        </p:spPr>
-        <p:txBody>
-          <a:bodyPr wrap="square" lIns="18288" tIns="18288" rIns="18288" bIns="18288" anchor="t">
-            <a:spAutoFit/>
-          </a:bodyPr>
-          <a:lstStyle/>
-          <a:p>
-            <a:pPr algn="l"/>
-            <a:r>
-              <a:rPr sz="1000" b="0" i="0">
-                <a:solidFill>
-                  <a:srgbClr val="F2F6FF"/>
-                </a:solidFill>
-                <a:latin typeface="Aptos"/>
-              </a:rPr>
-              <a:t>• Win32 tabbed dialog; fixed-size layout</a:t>
-            </a:r>
-          </a:p>
-        </p:txBody>
-      </p:sp>
-      <p:sp>
-        <p:nvSpPr>
-          <p:cNvPr id="13" name="TextBox 12"/>
-          <p:cNvSpPr txBox="1"/>
-          <p:nvPr/>
-        </p:nvSpPr>
-        <p:spPr>
-          <a:xfrm>
-            <a:off x="1005840" y="3108960"/>
-            <a:ext cx="4572000" cy="256032"/>
-          </a:xfrm>
-          <a:prstGeom prst="rect">
-            <a:avLst/>
-          </a:prstGeom>
-          <a:noFill/>
-        </p:spPr>
-        <p:txBody>
-          <a:bodyPr wrap="square" lIns="18288" tIns="18288" rIns="18288" bIns="18288" anchor="t">
-            <a:spAutoFit/>
-          </a:bodyPr>
-          <a:lstStyle/>
-          <a:p>
-            <a:pPr algn="l"/>
-            <a:r>
-              <a:rPr sz="1000" b="0" i="0">
-                <a:solidFill>
-                  <a:srgbClr val="F2F6FF"/>
-                </a:solidFill>
-                <a:latin typeface="Aptos"/>
-              </a:rPr>
-              <a:t>• Plain labels and static fields</a:t>
-            </a:r>
-          </a:p>
-        </p:txBody>
-      </p:sp>
-      <p:sp>
-        <p:nvSpPr>
-          <p:cNvPr id="14" name="TextBox 13"/>
-          <p:cNvSpPr txBox="1"/>
-          <p:nvPr/>
-        </p:nvSpPr>
-        <p:spPr>
-          <a:xfrm>
-            <a:off x="1005840" y="3493008"/>
-            <a:ext cx="4572000" cy="256032"/>
-          </a:xfrm>
-          <a:prstGeom prst="rect">
-            <a:avLst/>
-          </a:prstGeom>
-          <a:noFill/>
-        </p:spPr>
-        <p:txBody>
-          <a:bodyPr wrap="square" lIns="18288" tIns="18288" rIns="18288" bIns="18288" anchor="t">
-            <a:spAutoFit/>
-          </a:bodyPr>
-          <a:lstStyle/>
-          <a:p>
-            <a:pPr algn="l"/>
-            <a:r>
-              <a:rPr sz="1000" b="0" i="0">
-                <a:solidFill>
-                  <a:srgbClr val="F2F6FF"/>
-                </a:solidFill>
-                <a:latin typeface="Aptos"/>
-              </a:rPr>
-              <a:t>• Six fixed tabs; no global search</a:t>
-            </a:r>
-          </a:p>
-        </p:txBody>
-      </p:sp>
-      <p:sp>
-        <p:nvSpPr>
-          <p:cNvPr id="15" name="TextBox 14"/>
-          <p:cNvSpPr txBox="1"/>
-          <p:nvPr/>
-        </p:nvSpPr>
-        <p:spPr>
-          <a:xfrm>
-            <a:off x="1005840" y="3877056"/>
-            <a:ext cx="4572000" cy="256032"/>
-          </a:xfrm>
-          <a:prstGeom prst="rect">
-            <a:avLst/>
-          </a:prstGeom>
-          <a:noFill/>
-        </p:spPr>
-        <p:txBody>
-          <a:bodyPr wrap="square" lIns="18288" tIns="18288" rIns="18288" bIns="18288" anchor="t">
-            <a:spAutoFit/>
-          </a:bodyPr>
-          <a:lstStyle/>
-          <a:p>
-            <a:pPr algn="l"/>
-            <a:r>
-              <a:rPr sz="1000" b="0" i="0">
-                <a:solidFill>
-                  <a:srgbClr val="F2F6FF"/>
-                </a:solidFill>
-                <a:latin typeface="Aptos"/>
-              </a:rPr>
-              <a:t>• TXT / HTML report export</a:t>
-            </a:r>
-          </a:p>
-        </p:txBody>
-      </p:sp>
-      <p:sp>
-        <p:nvSpPr>
-          <p:cNvPr id="16" name="TextBox 15"/>
-          <p:cNvSpPr txBox="1"/>
-          <p:nvPr/>
-        </p:nvSpPr>
-        <p:spPr>
-          <a:xfrm>
-            <a:off x="1005840" y="4261104"/>
-            <a:ext cx="4572000" cy="256032"/>
-          </a:xfrm>
-          <a:prstGeom prst="rect">
-            <a:avLst/>
-          </a:prstGeom>
-          <a:noFill/>
-        </p:spPr>
-        <p:txBody>
-          <a:bodyPr wrap="square" lIns="18288" tIns="18288" rIns="18288" bIns="18288" anchor="t">
-            <a:spAutoFit/>
-          </a:bodyPr>
-          <a:lstStyle/>
-          <a:p>
-            <a:pPr algn="l"/>
-            <a:r>
-              <a:rPr sz="1000" b="0" i="0">
-                <a:solidFill>
-                  <a:srgbClr val="F2F6FF"/>
-                </a:solidFill>
-                <a:latin typeface="Aptos"/>
-              </a:rPr>
-              <a:t>• Manual refresh (F5)</a:t>
-            </a:r>
-          </a:p>
-        </p:txBody>
-      </p:sp>
-      <p:sp>
-        <p:nvSpPr>
-          <p:cNvPr id="17" name="TextBox 16"/>
-          <p:cNvSpPr txBox="1"/>
-          <p:nvPr/>
-        </p:nvSpPr>
-        <p:spPr>
-          <a:xfrm>
-            <a:off x="1005840" y="4645152"/>
-            <a:ext cx="4572000" cy="256032"/>
-          </a:xfrm>
-          <a:prstGeom prst="rect">
-            <a:avLst/>
-          </a:prstGeom>
-          <a:noFill/>
-        </p:spPr>
-        <p:txBody>
-          <a:bodyPr wrap="square" lIns="18288" tIns="18288" rIns="18288" bIns="18288" anchor="t">
-            <a:spAutoFit/>
-          </a:bodyPr>
-          <a:lstStyle/>
-          <a:p>
-            <a:pPr algn="l"/>
-            <a:r>
-              <a:rPr sz="1000" b="0" i="0">
-                <a:solidFill>
-                  <a:srgbClr val="F2F6FF"/>
-                </a:solidFill>
-                <a:latin typeface="Aptos"/>
-              </a:rPr>
-              <a:t>• Limited documented programmatic access</a:t>
-            </a:r>
-          </a:p>
-        </p:txBody>
-      </p:sp>
-      <p:sp>
-        <p:nvSpPr>
-          <p:cNvPr id="18" name="TextBox 17"/>
-          <p:cNvSpPr txBox="1"/>
-          <p:nvPr/>
-        </p:nvSpPr>
-        <p:spPr>
-          <a:xfrm>
-            <a:off x="1005840" y="5029200"/>
-            <a:ext cx="4572000" cy="256032"/>
-          </a:xfrm>
-          <a:prstGeom prst="rect">
-            <a:avLst/>
-          </a:prstGeom>
-          <a:noFill/>
-        </p:spPr>
-        <p:txBody>
-          <a:bodyPr wrap="square" lIns="18288" tIns="18288" rIns="18288" bIns="18288" anchor="t">
-            <a:spAutoFit/>
-          </a:bodyPr>
-          <a:lstStyle/>
-          <a:p>
-            <a:pPr algn="l"/>
-            <a:r>
-              <a:rPr sz="1000" b="0" i="0">
-                <a:solidFill>
-                  <a:srgbClr val="F2F6FF"/>
-                </a:solidFill>
-                <a:latin typeface="Aptos"/>
-              </a:rPr>
-              <a:t>• Field sources and limitations less visible</a:t>
-            </a:r>
-          </a:p>
-        </p:txBody>
-      </p:sp>
-      <p:sp>
-        <p:nvSpPr>
-          <p:cNvPr id="19" name="TextBox 18"/>
-          <p:cNvSpPr txBox="1"/>
-          <p:nvPr/>
-        </p:nvSpPr>
-        <p:spPr>
-          <a:xfrm>
-            <a:off x="1005840" y="5413248"/>
-            <a:ext cx="4572000" cy="256032"/>
-          </a:xfrm>
-          <a:prstGeom prst="rect">
-            <a:avLst/>
-          </a:prstGeom>
-          <a:noFill/>
-        </p:spPr>
-        <p:txBody>
-          <a:bodyPr wrap="square" lIns="18288" tIns="18288" rIns="18288" bIns="18288" anchor="t">
-            <a:spAutoFit/>
-          </a:bodyPr>
-          <a:lstStyle/>
-          <a:p>
-            <a:pPr algn="l"/>
-            <a:r>
-              <a:rPr sz="1000" b="0" i="0">
-                <a:solidFill>
-                  <a:srgbClr val="F2F6FF"/>
-                </a:solidFill>
-                <a:latin typeface="Aptos"/>
-              </a:rPr>
-              <a:t>• Manual validation workflow</a:t>
-            </a:r>
-          </a:p>
-        </p:txBody>
-      </p:sp>
-      <p:sp>
-        <p:nvSpPr>
-          <p:cNvPr id="20" name="TextBox 19"/>
-          <p:cNvSpPr txBox="1"/>
-          <p:nvPr/>
-        </p:nvSpPr>
-        <p:spPr>
-          <a:xfrm>
-            <a:off x="6492240" y="2724912"/>
-            <a:ext cx="4617720" cy="256032"/>
-          </a:xfrm>
-          <a:prstGeom prst="rect">
-            <a:avLst/>
-          </a:prstGeom>
-          <a:noFill/>
-        </p:spPr>
-        <p:txBody>
-          <a:bodyPr wrap="square" lIns="18288" tIns="18288" rIns="18288" bIns="18288" anchor="t">
-            <a:spAutoFit/>
-          </a:bodyPr>
-          <a:lstStyle/>
-          <a:p>
-            <a:pPr algn="l"/>
-            <a:r>
-              <a:rPr sz="1000" b="0" i="0">
-                <a:solidFill>
-                  <a:srgbClr val="F2F6FF"/>
-                </a:solidFill>
-                <a:latin typeface="Aptos"/>
-              </a:rPr>
-              <a:t>• Dark-first responsive web interface</a:t>
-            </a:r>
-          </a:p>
-        </p:txBody>
-      </p:sp>
-      <p:sp>
-        <p:nvSpPr>
-          <p:cNvPr id="21" name="TextBox 20"/>
-          <p:cNvSpPr txBox="1"/>
-          <p:nvPr/>
-        </p:nvSpPr>
-        <p:spPr>
-          <a:xfrm>
-            <a:off x="6492240" y="3108960"/>
-            <a:ext cx="4617720" cy="256032"/>
-          </a:xfrm>
-          <a:prstGeom prst="rect">
-            <a:avLst/>
-          </a:prstGeom>
-          <a:noFill/>
-        </p:spPr>
-        <p:txBody>
-          <a:bodyPr wrap="square" lIns="18288" tIns="18288" rIns="18288" bIns="18288" anchor="t">
-            <a:spAutoFit/>
-          </a:bodyPr>
-          <a:lstStyle/>
-          <a:p>
-            <a:pPr algn="l"/>
-            <a:r>
-              <a:rPr sz="1000" b="0" i="0">
-                <a:solidFill>
-                  <a:srgbClr val="F2F6FF"/>
-                </a:solidFill>
-                <a:latin typeface="Aptos"/>
-              </a:rPr>
-              <a:t>• Metric cards, SVG gauges, topology &amp; cache visuals</a:t>
-            </a:r>
-          </a:p>
-        </p:txBody>
-      </p:sp>
-      <p:sp>
-        <p:nvSpPr>
-          <p:cNvPr id="22" name="TextBox 21"/>
-          <p:cNvSpPr txBox="1"/>
-          <p:nvPr/>
-        </p:nvSpPr>
-        <p:spPr>
-          <a:xfrm>
-            <a:off x="6492240" y="3493008"/>
-            <a:ext cx="4617720" cy="256032"/>
-          </a:xfrm>
-          <a:prstGeom prst="rect">
-            <a:avLst/>
-          </a:prstGeom>
-          <a:noFill/>
-        </p:spPr>
-        <p:txBody>
-          <a:bodyPr wrap="square" lIns="18288" tIns="18288" rIns="18288" bIns="18288" anchor="t">
-            <a:spAutoFit/>
-          </a:bodyPr>
-          <a:lstStyle/>
-          <a:p>
-            <a:pPr algn="l"/>
-            <a:r>
-              <a:rPr sz="1000" b="0" i="0">
-                <a:solidFill>
-                  <a:srgbClr val="F2F6FF"/>
-                </a:solidFill>
-                <a:latin typeface="Aptos"/>
-              </a:rPr>
-              <a:t>• Sidebar navigation and global field search</a:t>
-            </a:r>
-          </a:p>
-        </p:txBody>
-      </p:sp>
-      <p:sp>
-        <p:nvSpPr>
-          <p:cNvPr id="23" name="TextBox 22"/>
-          <p:cNvSpPr txBox="1"/>
-          <p:nvPr/>
-        </p:nvSpPr>
-        <p:spPr>
-          <a:xfrm>
-            <a:off x="6492240" y="3877056"/>
-            <a:ext cx="4617720" cy="256032"/>
-          </a:xfrm>
-          <a:prstGeom prst="rect">
-            <a:avLst/>
-          </a:prstGeom>
-          <a:noFill/>
-        </p:spPr>
-        <p:txBody>
-          <a:bodyPr wrap="square" lIns="18288" tIns="18288" rIns="18288" bIns="18288" anchor="t">
-            <a:spAutoFit/>
-          </a:bodyPr>
-          <a:lstStyle/>
-          <a:p>
-            <a:pPr algn="l"/>
-            <a:r>
-              <a:rPr sz="1000" b="0" i="0">
-                <a:solidFill>
-                  <a:srgbClr val="F2F6FF"/>
-                </a:solidFill>
-                <a:latin typeface="Aptos"/>
-              </a:rPr>
-              <a:t>• One-click JSON and CSV export</a:t>
-            </a:r>
-          </a:p>
-        </p:txBody>
-      </p:sp>
-      <p:sp>
-        <p:nvSpPr>
-          <p:cNvPr id="24" name="TextBox 23"/>
-          <p:cNvSpPr txBox="1"/>
-          <p:nvPr/>
-        </p:nvSpPr>
-        <p:spPr>
-          <a:xfrm>
-            <a:off x="6492240" y="4261104"/>
-            <a:ext cx="4617720" cy="256032"/>
-          </a:xfrm>
-          <a:prstGeom prst="rect">
-            <a:avLst/>
-          </a:prstGeom>
-          <a:noFill/>
-        </p:spPr>
-        <p:txBody>
-          <a:bodyPr wrap="square" lIns="18288" tIns="18288" rIns="18288" bIns="18288" anchor="t">
-            <a:spAutoFit/>
-          </a:bodyPr>
-          <a:lstStyle/>
-          <a:p>
-            <a:pPr algn="l"/>
-            <a:r>
-              <a:rPr sz="1000" b="0" i="0">
-                <a:solidFill>
-                  <a:srgbClr val="F2F6FF"/>
-                </a:solidFill>
-                <a:latin typeface="Aptos"/>
-              </a:rPr>
-              <a:t>• Background polling for supported live metrics</a:t>
-            </a:r>
-          </a:p>
-        </p:txBody>
-      </p:sp>
-      <p:sp>
-        <p:nvSpPr>
-          <p:cNvPr id="25" name="TextBox 24"/>
-          <p:cNvSpPr txBox="1"/>
-          <p:nvPr/>
-        </p:nvSpPr>
-        <p:spPr>
-          <a:xfrm>
-            <a:off x="6492240" y="4645152"/>
-            <a:ext cx="4617720" cy="256032"/>
-          </a:xfrm>
-          <a:prstGeom prst="rect">
-            <a:avLst/>
-          </a:prstGeom>
-          <a:noFill/>
-        </p:spPr>
-        <p:txBody>
-          <a:bodyPr wrap="square" lIns="18288" tIns="18288" rIns="18288" bIns="18288" anchor="t">
-            <a:spAutoFit/>
-          </a:bodyPr>
-          <a:lstStyle/>
-          <a:p>
-            <a:pPr algn="l"/>
-            <a:r>
-              <a:rPr sz="1000" b="0" i="0">
-                <a:solidFill>
-                  <a:srgbClr val="F2F6FF"/>
-                </a:solidFill>
-                <a:latin typeface="Aptos"/>
-              </a:rPr>
-              <a:t>• Documented REST API and OpenAPI docs</a:t>
-            </a:r>
-          </a:p>
-        </p:txBody>
-      </p:sp>
-      <p:sp>
-        <p:nvSpPr>
-          <p:cNvPr id="26" name="TextBox 25"/>
-          <p:cNvSpPr txBox="1"/>
-          <p:nvPr/>
-        </p:nvSpPr>
-        <p:spPr>
-          <a:xfrm>
-            <a:off x="6492240" y="5029200"/>
-            <a:ext cx="4617720" cy="256032"/>
-          </a:xfrm>
-          <a:prstGeom prst="rect">
-            <a:avLst/>
-          </a:prstGeom>
-          <a:noFill/>
-        </p:spPr>
-        <p:txBody>
-          <a:bodyPr wrap="square" lIns="18288" tIns="18288" rIns="18288" bIns="18288" anchor="t">
-            <a:spAutoFit/>
-          </a:bodyPr>
-          <a:lstStyle/>
-          <a:p>
-            <a:pPr algn="l"/>
-            <a:r>
-              <a:rPr sz="1000" b="0" i="0">
-                <a:solidFill>
-                  <a:srgbClr val="F2F6FF"/>
-                </a:solidFill>
-                <a:latin typeface="Aptos"/>
-              </a:rPr>
-              <a:t>• Source, units, availability and limitations shown</a:t>
-            </a:r>
-          </a:p>
-        </p:txBody>
-      </p:sp>
-      <p:sp>
-        <p:nvSpPr>
-          <p:cNvPr id="27" name="TextBox 26"/>
-          <p:cNvSpPr txBox="1"/>
-          <p:nvPr/>
-        </p:nvSpPr>
-        <p:spPr>
-          <a:xfrm>
-            <a:off x="6492240" y="5413248"/>
-            <a:ext cx="4617720" cy="256032"/>
-          </a:xfrm>
-          <a:prstGeom prst="rect">
-            <a:avLst/>
-          </a:prstGeom>
-          <a:noFill/>
-        </p:spPr>
-        <p:txBody>
-          <a:bodyPr wrap="square" lIns="18288" tIns="18288" rIns="18288" bIns="18288" anchor="t">
-            <a:spAutoFit/>
-          </a:bodyPr>
-          <a:lstStyle/>
-          <a:p>
-            <a:pPr algn="l"/>
-            <a:r>
-              <a:rPr sz="1000" b="0" i="0">
-                <a:solidFill>
-                  <a:srgbClr val="F2F6FF"/>
-                </a:solidFill>
-                <a:latin typeface="Aptos"/>
-              </a:rPr>
-              <a:t>• Automated tests and repeatable validation</a:t>
-            </a:r>
-          </a:p>
-        </p:txBody>
-      </p:sp>
-      <p:sp>
-        <p:nvSpPr>
-          <p:cNvPr id="28" name="TextBox 27"/>
-          <p:cNvSpPr txBox="1"/>
-          <p:nvPr/>
-        </p:nvSpPr>
-        <p:spPr>
-          <a:xfrm>
-            <a:off x="777240" y="6199632"/>
-            <a:ext cx="10698480" cy="256032"/>
-          </a:xfrm>
-          <a:prstGeom prst="rect">
-            <a:avLst/>
-          </a:prstGeom>
-          <a:noFill/>
-        </p:spPr>
-        <p:txBody>
-          <a:bodyPr wrap="square" lIns="18288" tIns="18288" rIns="18288" bIns="18288" anchor="t">
-            <a:spAutoFit/>
-          </a:bodyPr>
-          <a:lstStyle/>
-          <a:p>
-            <a:pPr algn="l"/>
-            <a:r>
-              <a:rPr sz="1400" b="1" i="0">
-                <a:solidFill>
-                  <a:srgbClr val="F2F6FF"/>
-                </a:solidFill>
-                <a:latin typeface="Aptos"/>
-              </a:rPr>
-              <a:t>CPU-Z identifies your hardware. HW Intel explains, visualizes, and exposes it—with an API.</a:t>
-            </a:r>
-          </a:p>
-        </p:txBody>
-      </p:sp>
+          <a:effectLst>
+            <a:outerShdw blurRad="55000" dist="18000" dir="5400000" algn="tl" rotWithShape="0">
+              <a:srgbClr val="000000">
+                <a:alpha val="40000"/>
+              </a:srgbClr>
+            </a:outerShdw>
+          </a:effectLst>
+          <a:scene3d>
+            <a:camera prst="orthographicFront"/>
+            <a:lightRig rig="twoPt" dir="t">
+              <a:rot lat="0" lon="0" rev="7200000"/>
+            </a:lightRig>
+          </a:scene3d>
+          <a:sp3d>
+            <a:bevelT w="25400" h="19050"/>
+            <a:contourClr>
+              <a:srgbClr val="FFFFFF"/>
+            </a:contourClr>
+          </a:sp3d>
+        </p:spPr>
+      </p:pic>
     </p:spTree>
   </p:cSld>
   <p:clrMapOvr>

--- a/docs/Supplements/CPUZ_HW_Intel_Modernization_Overview.pptx
+++ b/docs/Supplements/CPUZ_HW_Intel_Modernization_Overview.pptx
@@ -3503,6 +3503,48 @@
                 <a:latin typeface="Aptos"/>
               </a:rPr>
               <a:t>PROJECT OVERVIEW</a:t>
+            </a:r>
+          </a:p>
+        </p:txBody>
+      </p:sp>
+      <p:sp>
+        <p:nvSpPr>
+          <p:cNvPr id="12" name="TextBox 11"/>
+          <p:cNvSpPr txBox="1"/>
+          <p:nvPr/>
+        </p:nvSpPr>
+        <p:spPr>
+          <a:xfrm>
+            <a:off x="804672" y="3127248"/>
+            <a:ext cx="6903720" cy="530352"/>
+          </a:xfrm>
+          <a:prstGeom prst="rect">
+            <a:avLst/>
+          </a:prstGeom>
+          <a:noFill/>
+        </p:spPr>
+        <p:txBody>
+          <a:bodyPr wrap="square" lIns="0" rIns="0" tIns="0" bIns="0" anchor="t">
+            <a:spAutoFit/>
+          </a:bodyPr>
+          <a:lstStyle/>
+          <a:p>
+            <a:pPr algn="l">
+              <a:spcBef>
+                <a:spcPts val="0"/>
+              </a:spcBef>
+              <a:spcAft>
+                <a:spcPts val="0"/>
+              </a:spcAft>
+            </a:pPr>
+            <a:r>
+              <a:rPr sz="1300">
+                <a:solidFill>
+                  <a:srgbClr val="A0AEC6"/>
+                </a:solidFill>
+                <a:latin typeface="Aptos"/>
+              </a:rPr>
+              <a:t>Use REA and Ghidra to trace CPU-Z behaviour, then build a separate, responsive HW Intel dashboard with evidence-backed fields, transparent data status, and repeatable validation.</a:t>
             </a:r>
           </a:p>
         </p:txBody>
